--- a/ID804/ID804_FA_Board/Docs/id804_fa_board_hw_issue_260908.pptx
+++ b/ID804/ID804_FA_Board/Docs/id804_fa_board_hw_issue_260908.pptx
@@ -6,18 +6,21 @@
   </p:sldMasterIdLst>
   <p:sldIdLst>
     <p:sldId id="564" r:id="rId2"/>
-    <p:sldId id="586" r:id="rId3"/>
-    <p:sldId id="569" r:id="rId4"/>
-    <p:sldId id="587" r:id="rId5"/>
-    <p:sldId id="588" r:id="rId6"/>
-    <p:sldId id="590" r:id="rId7"/>
-    <p:sldId id="592" r:id="rId8"/>
-    <p:sldId id="597" r:id="rId9"/>
-    <p:sldId id="598" r:id="rId10"/>
-    <p:sldId id="593" r:id="rId11"/>
-    <p:sldId id="594" r:id="rId12"/>
-    <p:sldId id="596" r:id="rId13"/>
-    <p:sldId id="589" r:id="rId14"/>
+    <p:sldId id="601" r:id="rId3"/>
+    <p:sldId id="586" r:id="rId4"/>
+    <p:sldId id="569" r:id="rId5"/>
+    <p:sldId id="587" r:id="rId6"/>
+    <p:sldId id="588" r:id="rId7"/>
+    <p:sldId id="590" r:id="rId8"/>
+    <p:sldId id="592" r:id="rId9"/>
+    <p:sldId id="597" r:id="rId10"/>
+    <p:sldId id="598" r:id="rId11"/>
+    <p:sldId id="599" r:id="rId12"/>
+    <p:sldId id="600" r:id="rId13"/>
+    <p:sldId id="593" r:id="rId14"/>
+    <p:sldId id="594" r:id="rId15"/>
+    <p:sldId id="596" r:id="rId16"/>
+    <p:sldId id="589" r:id="rId17"/>
   </p:sldIdLst>
   <p:sldSz cx="12192000" cy="6858000"/>
   <p:notesSz cx="6858000" cy="9144000"/>
@@ -271,7 +274,7 @@
           <a:p>
             <a:fld id="{7A6049FB-D58F-4316-AFBD-5B9DD005872D}" type="datetimeFigureOut">
               <a:rPr lang="ko-KR" altLang="en-US" smtClean="0"/>
-              <a:t>2026-09-09</a:t>
+              <a:t>2026-09-16</a:t>
             </a:fld>
             <a:endParaRPr lang="ko-KR" altLang="en-US"/>
           </a:p>
@@ -469,7 +472,7 @@
           <a:p>
             <a:fld id="{7A6049FB-D58F-4316-AFBD-5B9DD005872D}" type="datetimeFigureOut">
               <a:rPr lang="ko-KR" altLang="en-US" smtClean="0"/>
-              <a:t>2026-09-09</a:t>
+              <a:t>2026-09-16</a:t>
             </a:fld>
             <a:endParaRPr lang="ko-KR" altLang="en-US"/>
           </a:p>
@@ -677,7 +680,7 @@
           <a:p>
             <a:fld id="{7A6049FB-D58F-4316-AFBD-5B9DD005872D}" type="datetimeFigureOut">
               <a:rPr lang="ko-KR" altLang="en-US" smtClean="0"/>
-              <a:t>2026-09-09</a:t>
+              <a:t>2026-09-16</a:t>
             </a:fld>
             <a:endParaRPr lang="ko-KR" altLang="en-US"/>
           </a:p>
@@ -1255,7 +1258,7 @@
           <a:p>
             <a:fld id="{7A6049FB-D58F-4316-AFBD-5B9DD005872D}" type="datetimeFigureOut">
               <a:rPr lang="ko-KR" altLang="en-US" smtClean="0"/>
-              <a:t>2026-09-09</a:t>
+              <a:t>2026-09-16</a:t>
             </a:fld>
             <a:endParaRPr lang="ko-KR" altLang="en-US"/>
           </a:p>
@@ -1530,7 +1533,7 @@
           <a:p>
             <a:fld id="{7A6049FB-D58F-4316-AFBD-5B9DD005872D}" type="datetimeFigureOut">
               <a:rPr lang="ko-KR" altLang="en-US" smtClean="0"/>
-              <a:t>2026-09-09</a:t>
+              <a:t>2026-09-16</a:t>
             </a:fld>
             <a:endParaRPr lang="ko-KR" altLang="en-US"/>
           </a:p>
@@ -1795,7 +1798,7 @@
           <a:p>
             <a:fld id="{7A6049FB-D58F-4316-AFBD-5B9DD005872D}" type="datetimeFigureOut">
               <a:rPr lang="ko-KR" altLang="en-US" smtClean="0"/>
-              <a:t>2026-09-09</a:t>
+              <a:t>2026-09-16</a:t>
             </a:fld>
             <a:endParaRPr lang="ko-KR" altLang="en-US"/>
           </a:p>
@@ -2207,7 +2210,7 @@
           <a:p>
             <a:fld id="{7A6049FB-D58F-4316-AFBD-5B9DD005872D}" type="datetimeFigureOut">
               <a:rPr lang="ko-KR" altLang="en-US" smtClean="0"/>
-              <a:t>2026-09-09</a:t>
+              <a:t>2026-09-16</a:t>
             </a:fld>
             <a:endParaRPr lang="ko-KR" altLang="en-US"/>
           </a:p>
@@ -2348,7 +2351,7 @@
           <a:p>
             <a:fld id="{7A6049FB-D58F-4316-AFBD-5B9DD005872D}" type="datetimeFigureOut">
               <a:rPr lang="ko-KR" altLang="en-US" smtClean="0"/>
-              <a:t>2026-09-09</a:t>
+              <a:t>2026-09-16</a:t>
             </a:fld>
             <a:endParaRPr lang="ko-KR" altLang="en-US"/>
           </a:p>
@@ -2461,7 +2464,7 @@
           <a:p>
             <a:fld id="{7A6049FB-D58F-4316-AFBD-5B9DD005872D}" type="datetimeFigureOut">
               <a:rPr lang="ko-KR" altLang="en-US" smtClean="0"/>
-              <a:t>2026-09-09</a:t>
+              <a:t>2026-09-16</a:t>
             </a:fld>
             <a:endParaRPr lang="ko-KR" altLang="en-US"/>
           </a:p>
@@ -2772,7 +2775,7 @@
           <a:p>
             <a:fld id="{7A6049FB-D58F-4316-AFBD-5B9DD005872D}" type="datetimeFigureOut">
               <a:rPr lang="ko-KR" altLang="en-US" smtClean="0"/>
-              <a:t>2026-09-09</a:t>
+              <a:t>2026-09-16</a:t>
             </a:fld>
             <a:endParaRPr lang="ko-KR" altLang="en-US"/>
           </a:p>
@@ -3060,7 +3063,7 @@
           <a:p>
             <a:fld id="{7A6049FB-D58F-4316-AFBD-5B9DD005872D}" type="datetimeFigureOut">
               <a:rPr lang="ko-KR" altLang="en-US" smtClean="0"/>
-              <a:t>2026-09-09</a:t>
+              <a:t>2026-09-16</a:t>
             </a:fld>
             <a:endParaRPr lang="ko-KR" altLang="en-US"/>
           </a:p>
@@ -3301,7 +3304,7 @@
           <a:p>
             <a:fld id="{7A6049FB-D58F-4316-AFBD-5B9DD005872D}" type="datetimeFigureOut">
               <a:rPr lang="ko-KR" altLang="en-US" smtClean="0"/>
-              <a:t>2026-09-09</a:t>
+              <a:t>2026-09-16</a:t>
             </a:fld>
             <a:endParaRPr lang="ko-KR" altLang="en-US"/>
           </a:p>
@@ -3910,6 +3913,1419 @@
         <p:cNvPr id="1" name="">
           <a:extLst>
             <a:ext uri="{FF2B5EF4-FFF2-40B4-BE49-F238E27FC236}">
+              <a16:creationId xmlns:a16="http://schemas.microsoft.com/office/drawing/2014/main" id="{2DAF9809-4A14-789F-908F-5BC6C7FD7E1C}"/>
+            </a:ext>
+          </a:extLst>
+        </p:cNvPr>
+        <p:cNvGrpSpPr/>
+        <p:nvPr/>
+      </p:nvGrpSpPr>
+      <p:grpSpPr>
+        <a:xfrm>
+          <a:off x="0" y="0"/>
+          <a:ext cx="0" cy="0"/>
+          <a:chOff x="0" y="0"/>
+          <a:chExt cx="0" cy="0"/>
+        </a:xfrm>
+      </p:grpSpPr>
+      <p:sp>
+        <p:nvSpPr>
+          <p:cNvPr id="9" name="슬라이드 번호 개체 틀 8">
+            <a:extLst>
+              <a:ext uri="{FF2B5EF4-FFF2-40B4-BE49-F238E27FC236}">
+                <a16:creationId xmlns:a16="http://schemas.microsoft.com/office/drawing/2014/main" id="{8D960AF7-204F-9BA5-4E07-BC4769C95C8A}"/>
+              </a:ext>
+            </a:extLst>
+          </p:cNvPr>
+          <p:cNvSpPr>
+            <a:spLocks noGrp="1"/>
+          </p:cNvSpPr>
+          <p:nvPr>
+            <p:ph type="sldNum" sz="quarter" idx="4"/>
+          </p:nvPr>
+        </p:nvSpPr>
+        <p:spPr/>
+        <p:txBody>
+          <a:bodyPr/>
+          <a:lstStyle/>
+          <a:p>
+            <a:fld id="{83D7C3DD-38B7-4D6D-B394-0849C77A12EC}" type="slidenum">
+              <a:rPr lang="en-US" smtClean="0">
+                <a:latin typeface="Calibri Light" panose="020F0302020204030204" pitchFamily="34" charset="0"/>
+                <a:cs typeface="Calibri Light" panose="020F0302020204030204" pitchFamily="34" charset="0"/>
+              </a:rPr>
+              <a:pPr/>
+              <a:t>10</a:t>
+            </a:fld>
+            <a:endParaRPr lang="en-US" dirty="0">
+              <a:latin typeface="Calibri Light" panose="020F0302020204030204" pitchFamily="34" charset="0"/>
+              <a:cs typeface="Calibri Light" panose="020F0302020204030204" pitchFamily="34" charset="0"/>
+            </a:endParaRPr>
+          </a:p>
+        </p:txBody>
+      </p:sp>
+      <p:sp>
+        <p:nvSpPr>
+          <p:cNvPr id="3" name="TextBox 2">
+            <a:extLst>
+              <a:ext uri="{FF2B5EF4-FFF2-40B4-BE49-F238E27FC236}">
+                <a16:creationId xmlns:a16="http://schemas.microsoft.com/office/drawing/2014/main" id="{FAD06A71-99E5-467F-0CE4-5EDA5BCEDDA3}"/>
+              </a:ext>
+            </a:extLst>
+          </p:cNvPr>
+          <p:cNvSpPr txBox="1"/>
+          <p:nvPr/>
+        </p:nvSpPr>
+        <p:spPr>
+          <a:xfrm>
+            <a:off x="182088" y="0"/>
+            <a:ext cx="12009912" cy="498764"/>
+          </a:xfrm>
+          <a:prstGeom prst="rect">
+            <a:avLst/>
+          </a:prstGeom>
+          <a:noFill/>
+        </p:spPr>
+        <p:txBody>
+          <a:bodyPr wrap="square" lIns="36000" tIns="36000" rIns="36000" bIns="36000" rtlCol="0" anchor="ctr" anchorCtr="0">
+            <a:noAutofit/>
+          </a:bodyPr>
+          <a:lstStyle/>
+          <a:p>
+            <a:r>
+              <a:rPr lang="en-US" altLang="ko-KR" b="1" dirty="0">
+                <a:latin typeface="+mj-lt"/>
+                <a:cs typeface="Calibri Light" panose="020F0302020204030204" pitchFamily="34" charset="0"/>
+              </a:rPr>
+              <a:t>ID804_RXD / </a:t>
+            </a:r>
+            <a:r>
+              <a:rPr lang="en-US" altLang="ko-KR" b="1" dirty="0">
+                <a:cs typeface="Calibri Light" panose="020F0302020204030204" pitchFamily="34" charset="0"/>
+              </a:rPr>
+              <a:t>ID804-RXD</a:t>
+            </a:r>
+            <a:r>
+              <a:rPr lang="en-US" altLang="ko-KR" b="1" dirty="0">
+                <a:latin typeface="+mj-lt"/>
+                <a:cs typeface="Calibri Light" panose="020F0302020204030204" pitchFamily="34" charset="0"/>
+              </a:rPr>
+              <a:t> Net Label </a:t>
+            </a:r>
+            <a:r>
+              <a:rPr lang="ko-KR" altLang="en-US" b="1" dirty="0">
+                <a:latin typeface="+mj-lt"/>
+                <a:cs typeface="Calibri Light" panose="020F0302020204030204" pitchFamily="34" charset="0"/>
+              </a:rPr>
+              <a:t>불일치</a:t>
+            </a:r>
+            <a:endParaRPr lang="en-US" altLang="ko-KR" dirty="0">
+              <a:latin typeface="+mj-lt"/>
+              <a:cs typeface="Arial" panose="020B0604020202020204" pitchFamily="34" charset="0"/>
+            </a:endParaRPr>
+          </a:p>
+        </p:txBody>
+      </p:sp>
+      <p:pic>
+        <p:nvPicPr>
+          <p:cNvPr id="7" name="그림 6">
+            <a:extLst>
+              <a:ext uri="{FF2B5EF4-FFF2-40B4-BE49-F238E27FC236}">
+                <a16:creationId xmlns:a16="http://schemas.microsoft.com/office/drawing/2014/main" id="{83B030F8-12C8-7946-1D9B-83734ABEE277}"/>
+              </a:ext>
+            </a:extLst>
+          </p:cNvPr>
+          <p:cNvPicPr>
+            <a:picLocks noChangeAspect="1"/>
+          </p:cNvPicPr>
+          <p:nvPr/>
+        </p:nvPicPr>
+        <p:blipFill>
+          <a:blip r:embed="rId2"/>
+          <a:stretch>
+            <a:fillRect/>
+          </a:stretch>
+        </p:blipFill>
+        <p:spPr>
+          <a:xfrm>
+            <a:off x="930188" y="2078498"/>
+            <a:ext cx="6039160" cy="3759393"/>
+          </a:xfrm>
+          <a:prstGeom prst="rect">
+            <a:avLst/>
+          </a:prstGeom>
+          <a:ln>
+            <a:solidFill>
+              <a:schemeClr val="accent1"/>
+            </a:solidFill>
+          </a:ln>
+        </p:spPr>
+      </p:pic>
+      <p:pic>
+        <p:nvPicPr>
+          <p:cNvPr id="10" name="그림 9">
+            <a:extLst>
+              <a:ext uri="{FF2B5EF4-FFF2-40B4-BE49-F238E27FC236}">
+                <a16:creationId xmlns:a16="http://schemas.microsoft.com/office/drawing/2014/main" id="{056E1648-FE1B-39C8-24E9-028E45A77496}"/>
+              </a:ext>
+            </a:extLst>
+          </p:cNvPr>
+          <p:cNvPicPr>
+            <a:picLocks noChangeAspect="1"/>
+          </p:cNvPicPr>
+          <p:nvPr/>
+        </p:nvPicPr>
+        <p:blipFill>
+          <a:blip r:embed="rId3"/>
+          <a:stretch>
+            <a:fillRect/>
+          </a:stretch>
+        </p:blipFill>
+        <p:spPr>
+          <a:xfrm>
+            <a:off x="7770642" y="2716705"/>
+            <a:ext cx="3378374" cy="2482978"/>
+          </a:xfrm>
+          <a:prstGeom prst="rect">
+            <a:avLst/>
+          </a:prstGeom>
+          <a:ln>
+            <a:solidFill>
+              <a:schemeClr val="accent1"/>
+            </a:solidFill>
+          </a:ln>
+        </p:spPr>
+      </p:pic>
+      <p:sp>
+        <p:nvSpPr>
+          <p:cNvPr id="13" name="직사각형 12">
+            <a:extLst>
+              <a:ext uri="{FF2B5EF4-FFF2-40B4-BE49-F238E27FC236}">
+                <a16:creationId xmlns:a16="http://schemas.microsoft.com/office/drawing/2014/main" id="{7656ACD5-8B8A-7B30-4248-CFF3A610ABC6}"/>
+              </a:ext>
+            </a:extLst>
+          </p:cNvPr>
+          <p:cNvSpPr/>
+          <p:nvPr/>
+        </p:nvSpPr>
+        <p:spPr>
+          <a:xfrm>
+            <a:off x="1035364" y="4260948"/>
+            <a:ext cx="502920" cy="152400"/>
+          </a:xfrm>
+          <a:prstGeom prst="rect">
+            <a:avLst/>
+          </a:prstGeom>
+          <a:noFill/>
+          <a:ln>
+            <a:solidFill>
+              <a:srgbClr val="FF0000"/>
+            </a:solidFill>
+          </a:ln>
+        </p:spPr>
+        <p:style>
+          <a:lnRef idx="2">
+            <a:schemeClr val="accent1">
+              <a:shade val="15000"/>
+            </a:schemeClr>
+          </a:lnRef>
+          <a:fillRef idx="1">
+            <a:schemeClr val="accent1"/>
+          </a:fillRef>
+          <a:effectRef idx="0">
+            <a:schemeClr val="accent1"/>
+          </a:effectRef>
+          <a:fontRef idx="minor">
+            <a:schemeClr val="lt1"/>
+          </a:fontRef>
+        </p:style>
+        <p:txBody>
+          <a:bodyPr rtlCol="0" anchor="ctr"/>
+          <a:lstStyle/>
+          <a:p>
+            <a:pPr algn="ctr"/>
+            <a:endParaRPr lang="ko-KR" altLang="en-US"/>
+          </a:p>
+        </p:txBody>
+      </p:sp>
+      <p:sp>
+        <p:nvSpPr>
+          <p:cNvPr id="15" name="직사각형 14">
+            <a:extLst>
+              <a:ext uri="{FF2B5EF4-FFF2-40B4-BE49-F238E27FC236}">
+                <a16:creationId xmlns:a16="http://schemas.microsoft.com/office/drawing/2014/main" id="{64ECD5F1-5E3A-E0FD-5898-1E9F1CBA144C}"/>
+              </a:ext>
+            </a:extLst>
+          </p:cNvPr>
+          <p:cNvSpPr/>
+          <p:nvPr/>
+        </p:nvSpPr>
+        <p:spPr>
+          <a:xfrm>
+            <a:off x="10653716" y="3643728"/>
+            <a:ext cx="502920" cy="152400"/>
+          </a:xfrm>
+          <a:prstGeom prst="rect">
+            <a:avLst/>
+          </a:prstGeom>
+          <a:noFill/>
+          <a:ln>
+            <a:solidFill>
+              <a:srgbClr val="FF0000"/>
+            </a:solidFill>
+          </a:ln>
+        </p:spPr>
+        <p:style>
+          <a:lnRef idx="2">
+            <a:schemeClr val="accent1">
+              <a:shade val="15000"/>
+            </a:schemeClr>
+          </a:lnRef>
+          <a:fillRef idx="1">
+            <a:schemeClr val="accent1"/>
+          </a:fillRef>
+          <a:effectRef idx="0">
+            <a:schemeClr val="accent1"/>
+          </a:effectRef>
+          <a:fontRef idx="minor">
+            <a:schemeClr val="lt1"/>
+          </a:fontRef>
+        </p:style>
+        <p:txBody>
+          <a:bodyPr rtlCol="0" anchor="ctr"/>
+          <a:lstStyle/>
+          <a:p>
+            <a:pPr algn="ctr"/>
+            <a:endParaRPr lang="ko-KR" altLang="en-US"/>
+          </a:p>
+        </p:txBody>
+      </p:sp>
+      <p:sp>
+        <p:nvSpPr>
+          <p:cNvPr id="2" name="TextBox 1">
+            <a:extLst>
+              <a:ext uri="{FF2B5EF4-FFF2-40B4-BE49-F238E27FC236}">
+                <a16:creationId xmlns:a16="http://schemas.microsoft.com/office/drawing/2014/main" id="{8C4A4C62-4043-97B8-FFC5-58C64F33015D}"/>
+              </a:ext>
+            </a:extLst>
+          </p:cNvPr>
+          <p:cNvSpPr txBox="1"/>
+          <p:nvPr/>
+        </p:nvSpPr>
+        <p:spPr>
+          <a:xfrm>
+            <a:off x="945428" y="3958194"/>
+            <a:ext cx="802406" cy="253916"/>
+          </a:xfrm>
+          <a:prstGeom prst="rect">
+            <a:avLst/>
+          </a:prstGeom>
+          <a:solidFill>
+            <a:schemeClr val="tx1"/>
+          </a:solidFill>
+        </p:spPr>
+        <p:txBody>
+          <a:bodyPr wrap="square" rtlCol="0" anchor="ctr">
+            <a:spAutoFit/>
+          </a:bodyPr>
+          <a:lstStyle/>
+          <a:p>
+            <a:pPr algn="ctr"/>
+            <a:r>
+              <a:rPr lang="en-US" altLang="ko-KR" sz="1050" dirty="0">
+                <a:solidFill>
+                  <a:srgbClr val="FF0000"/>
+                </a:solidFill>
+              </a:rPr>
+              <a:t>Under Bar</a:t>
+            </a:r>
+            <a:endParaRPr lang="ko-KR" altLang="en-US" sz="1050" dirty="0">
+              <a:solidFill>
+                <a:srgbClr val="FF0000"/>
+              </a:solidFill>
+            </a:endParaRPr>
+          </a:p>
+        </p:txBody>
+      </p:sp>
+      <p:sp>
+        <p:nvSpPr>
+          <p:cNvPr id="5" name="TextBox 4">
+            <a:extLst>
+              <a:ext uri="{FF2B5EF4-FFF2-40B4-BE49-F238E27FC236}">
+                <a16:creationId xmlns:a16="http://schemas.microsoft.com/office/drawing/2014/main" id="{D6F98106-3411-C948-8B89-288B906A46CD}"/>
+              </a:ext>
+            </a:extLst>
+          </p:cNvPr>
+          <p:cNvSpPr txBox="1"/>
+          <p:nvPr/>
+        </p:nvSpPr>
+        <p:spPr>
+          <a:xfrm>
+            <a:off x="10503973" y="3330221"/>
+            <a:ext cx="652663" cy="253916"/>
+          </a:xfrm>
+          <a:prstGeom prst="rect">
+            <a:avLst/>
+          </a:prstGeom>
+          <a:solidFill>
+            <a:schemeClr val="tx1"/>
+          </a:solidFill>
+        </p:spPr>
+        <p:txBody>
+          <a:bodyPr wrap="square" rtlCol="0" anchor="ctr">
+            <a:spAutoFit/>
+          </a:bodyPr>
+          <a:lstStyle/>
+          <a:p>
+            <a:pPr algn="ctr"/>
+            <a:r>
+              <a:rPr lang="ko-KR" altLang="ko-KR" sz="1050" dirty="0" err="1">
+                <a:solidFill>
+                  <a:srgbClr val="FF0000"/>
+                </a:solidFill>
+              </a:rPr>
+              <a:t>Hyphen</a:t>
+            </a:r>
+            <a:endParaRPr lang="ko-KR" altLang="en-US" sz="1050" dirty="0">
+              <a:solidFill>
+                <a:srgbClr val="FF0000"/>
+              </a:solidFill>
+            </a:endParaRPr>
+          </a:p>
+        </p:txBody>
+      </p:sp>
+      <p:sp>
+        <p:nvSpPr>
+          <p:cNvPr id="14" name="TextBox 13">
+            <a:extLst>
+              <a:ext uri="{FF2B5EF4-FFF2-40B4-BE49-F238E27FC236}">
+                <a16:creationId xmlns:a16="http://schemas.microsoft.com/office/drawing/2014/main" id="{652965E4-57D1-8186-238A-B8CD39EC2D4B}"/>
+              </a:ext>
+            </a:extLst>
+          </p:cNvPr>
+          <p:cNvSpPr txBox="1"/>
+          <p:nvPr/>
+        </p:nvSpPr>
+        <p:spPr>
+          <a:xfrm>
+            <a:off x="392581" y="630922"/>
+            <a:ext cx="6700873" cy="985911"/>
+          </a:xfrm>
+          <a:prstGeom prst="rect">
+            <a:avLst/>
+          </a:prstGeom>
+          <a:noFill/>
+        </p:spPr>
+        <p:txBody>
+          <a:bodyPr wrap="none" rtlCol="0">
+            <a:spAutoFit/>
+          </a:bodyPr>
+          <a:lstStyle/>
+          <a:p>
+            <a:pPr>
+              <a:lnSpc>
+                <a:spcPct val="150000"/>
+              </a:lnSpc>
+            </a:pPr>
+            <a:r>
+              <a:rPr lang="ko-KR" altLang="en-US" sz="1000" dirty="0"/>
+              <a:t>개선 전</a:t>
+            </a:r>
+            <a:endParaRPr lang="en-US" altLang="ko-KR" sz="1000" dirty="0"/>
+          </a:p>
+          <a:p>
+            <a:pPr>
+              <a:lnSpc>
+                <a:spcPct val="150000"/>
+              </a:lnSpc>
+            </a:pPr>
+            <a:r>
+              <a:rPr lang="en-US" altLang="ko-KR" sz="1000" dirty="0"/>
+              <a:t> - </a:t>
+            </a:r>
+            <a:r>
+              <a:rPr lang="ko-KR" altLang="en-US" sz="1000" dirty="0"/>
+              <a:t>회로도에서 </a:t>
+            </a:r>
+            <a:r>
+              <a:rPr lang="en-US" altLang="ko-KR" sz="1000" dirty="0"/>
+              <a:t>ID804_RXD</a:t>
+            </a:r>
+            <a:r>
+              <a:rPr lang="ko-KR" altLang="en-US" sz="1000" dirty="0"/>
+              <a:t>와 </a:t>
+            </a:r>
+            <a:r>
+              <a:rPr lang="en-US" altLang="ko-KR" sz="1000" dirty="0"/>
+              <a:t>ID804-RXD</a:t>
+            </a:r>
+            <a:r>
+              <a:rPr lang="ko-KR" altLang="en-US" sz="1000" dirty="0"/>
+              <a:t>가 서로 다른 </a:t>
+            </a:r>
+            <a:r>
+              <a:rPr lang="en-US" altLang="ko-KR" sz="1000" dirty="0"/>
+              <a:t>Net Label</a:t>
+            </a:r>
+            <a:r>
+              <a:rPr lang="ko-KR" altLang="en-US" sz="1000" dirty="0"/>
+              <a:t>로 정의되어 </a:t>
+            </a:r>
+            <a:r>
+              <a:rPr lang="en-US" altLang="ko-KR" sz="1000" dirty="0"/>
+              <a:t>RXD </a:t>
+            </a:r>
+            <a:r>
+              <a:rPr lang="ko-KR" altLang="en-US" sz="1000" dirty="0"/>
+              <a:t>신호 경로가 단절된 것을 확인함</a:t>
+            </a:r>
+            <a:r>
+              <a:rPr lang="en-US" altLang="ko-KR" sz="1000" dirty="0"/>
+              <a:t>.</a:t>
+            </a:r>
+            <a:br>
+              <a:rPr lang="en-US" altLang="ko-KR" sz="1000" dirty="0"/>
+            </a:br>
+            <a:r>
+              <a:rPr lang="ko-KR" altLang="en-US" sz="1000" dirty="0"/>
+              <a:t>개선 후</a:t>
+            </a:r>
+            <a:endParaRPr lang="en-US" altLang="ko-KR" sz="1000" dirty="0"/>
+          </a:p>
+          <a:p>
+            <a:pPr>
+              <a:lnSpc>
+                <a:spcPct val="150000"/>
+              </a:lnSpc>
+            </a:pPr>
+            <a:r>
+              <a:rPr lang="en-US" altLang="ko-KR" sz="1000" dirty="0"/>
+              <a:t> - </a:t>
+            </a:r>
+            <a:r>
+              <a:rPr lang="ko-KR" altLang="en-US" sz="1000" dirty="0"/>
+              <a:t>단절된 </a:t>
+            </a:r>
+            <a:r>
+              <a:rPr lang="en-US" altLang="ko-KR" sz="1000" dirty="0"/>
+              <a:t>RXD </a:t>
+            </a:r>
+            <a:r>
+              <a:rPr lang="ko-KR" altLang="en-US" sz="1000" dirty="0"/>
+              <a:t>신호 경로를 점퍼로 연결하여 통신을 복구함</a:t>
+            </a:r>
+            <a:r>
+              <a:rPr lang="en-US" altLang="ko-KR" sz="1000" dirty="0"/>
+              <a:t>.</a:t>
+            </a:r>
+            <a:endParaRPr lang="ko-KR" altLang="en-US" sz="1000" dirty="0"/>
+          </a:p>
+        </p:txBody>
+      </p:sp>
+    </p:spTree>
+    <p:extLst>
+      <p:ext uri="{BB962C8B-B14F-4D97-AF65-F5344CB8AC3E}">
+        <p14:creationId xmlns:p14="http://schemas.microsoft.com/office/powerpoint/2010/main" val="266344806"/>
+      </p:ext>
+    </p:extLst>
+  </p:cSld>
+  <p:clrMapOvr>
+    <a:masterClrMapping/>
+  </p:clrMapOvr>
+</p:sld>
+</file>
+
+<file path=ppt/slides/slide11.xml><?xml version="1.0" encoding="utf-8"?>
+<p:sld xmlns:a="http://schemas.openxmlformats.org/drawingml/2006/main" xmlns:r="http://schemas.openxmlformats.org/officeDocument/2006/relationships" xmlns:p="http://schemas.openxmlformats.org/presentationml/2006/main">
+  <p:cSld>
+    <p:spTree>
+      <p:nvGrpSpPr>
+        <p:cNvPr id="1" name="">
+          <a:extLst>
+            <a:ext uri="{FF2B5EF4-FFF2-40B4-BE49-F238E27FC236}">
+              <a16:creationId xmlns:a16="http://schemas.microsoft.com/office/drawing/2014/main" id="{CEACF7C8-EFE0-4E64-DF52-020B38B34729}"/>
+            </a:ext>
+          </a:extLst>
+        </p:cNvPr>
+        <p:cNvGrpSpPr/>
+        <p:nvPr/>
+      </p:nvGrpSpPr>
+      <p:grpSpPr>
+        <a:xfrm>
+          <a:off x="0" y="0"/>
+          <a:ext cx="0" cy="0"/>
+          <a:chOff x="0" y="0"/>
+          <a:chExt cx="0" cy="0"/>
+        </a:xfrm>
+      </p:grpSpPr>
+      <p:sp>
+        <p:nvSpPr>
+          <p:cNvPr id="2" name="제목 1">
+            <a:extLst>
+              <a:ext uri="{FF2B5EF4-FFF2-40B4-BE49-F238E27FC236}">
+                <a16:creationId xmlns:a16="http://schemas.microsoft.com/office/drawing/2014/main" id="{E1327369-884A-DCA3-31D6-D67C25D3711D}"/>
+              </a:ext>
+            </a:extLst>
+          </p:cNvPr>
+          <p:cNvSpPr>
+            <a:spLocks noGrp="1"/>
+          </p:cNvSpPr>
+          <p:nvPr>
+            <p:ph type="ctrTitle"/>
+          </p:nvPr>
+        </p:nvSpPr>
+        <p:spPr>
+          <a:xfrm>
+            <a:off x="0" y="2227708"/>
+            <a:ext cx="12192000" cy="2402584"/>
+          </a:xfrm>
+        </p:spPr>
+        <p:txBody>
+          <a:bodyPr anchor="ctr">
+            <a:normAutofit/>
+          </a:bodyPr>
+          <a:lstStyle/>
+          <a:p>
+            <a:pPr>
+              <a:lnSpc>
+                <a:spcPct val="100000"/>
+              </a:lnSpc>
+            </a:pPr>
+            <a:r>
+              <a:rPr lang="en-US" sz="3200" b="1" dirty="0">
+                <a:cs typeface="Calibri Light" panose="020F0302020204030204" pitchFamily="34" charset="0"/>
+              </a:rPr>
+              <a:t>MCU</a:t>
+            </a:r>
+            <a:r>
+              <a:rPr lang="ko-KR" altLang="en-US" sz="3200" b="1" dirty="0">
+                <a:cs typeface="Calibri Light" panose="020F0302020204030204" pitchFamily="34" charset="0"/>
+              </a:rPr>
+              <a:t> </a:t>
+            </a:r>
+            <a:r>
+              <a:rPr lang="en-US" sz="3200" b="1" dirty="0">
+                <a:cs typeface="Calibri Light" panose="020F0302020204030204" pitchFamily="34" charset="0"/>
+              </a:rPr>
+              <a:t>I2C</a:t>
+            </a:r>
+            <a:r>
+              <a:rPr lang="ko-KR" altLang="en-US" sz="3200" b="1" dirty="0">
+                <a:cs typeface="Calibri Light" panose="020F0302020204030204" pitchFamily="34" charset="0"/>
+              </a:rPr>
+              <a:t> </a:t>
+            </a:r>
+            <a:r>
+              <a:rPr lang="en-US" altLang="ko-KR" sz="3200" b="1" dirty="0">
+                <a:cs typeface="Calibri Light" panose="020F0302020204030204" pitchFamily="34" charset="0"/>
+              </a:rPr>
+              <a:t>SCL/SDA</a:t>
+            </a:r>
+            <a:br>
+              <a:rPr lang="en-US" altLang="ko-KR" sz="3200" b="1" dirty="0">
+                <a:cs typeface="Calibri Light" panose="020F0302020204030204" pitchFamily="34" charset="0"/>
+              </a:rPr>
+            </a:br>
+            <a:r>
+              <a:rPr lang="ko-KR" altLang="en-US" sz="3200" b="1" dirty="0">
+                <a:cs typeface="Calibri Light" panose="020F0302020204030204" pitchFamily="34" charset="0"/>
+              </a:rPr>
+              <a:t>회로도 </a:t>
+            </a:r>
+            <a:r>
+              <a:rPr lang="en-US" altLang="ko-KR" sz="3200" b="1" dirty="0">
+                <a:cs typeface="Calibri Light" panose="020F0302020204030204" pitchFamily="34" charset="0"/>
+              </a:rPr>
+              <a:t>Net</a:t>
+            </a:r>
+            <a:r>
+              <a:rPr lang="ko-KR" altLang="en-US" sz="3200" b="1" dirty="0">
+                <a:cs typeface="Calibri Light" panose="020F0302020204030204" pitchFamily="34" charset="0"/>
+              </a:rPr>
+              <a:t> 연결 반전</a:t>
+            </a:r>
+            <a:endParaRPr lang="en-US" sz="3200" b="1" dirty="0">
+              <a:cs typeface="Calibri Light" panose="020F0302020204030204" pitchFamily="34" charset="0"/>
+            </a:endParaRPr>
+          </a:p>
+        </p:txBody>
+      </p:sp>
+    </p:spTree>
+    <p:extLst>
+      <p:ext uri="{BB962C8B-B14F-4D97-AF65-F5344CB8AC3E}">
+        <p14:creationId xmlns:p14="http://schemas.microsoft.com/office/powerpoint/2010/main" val="3894451"/>
+      </p:ext>
+    </p:extLst>
+  </p:cSld>
+  <p:clrMapOvr>
+    <a:masterClrMapping/>
+  </p:clrMapOvr>
+</p:sld>
+</file>
+
+<file path=ppt/slides/slide12.xml><?xml version="1.0" encoding="utf-8"?>
+<p:sld xmlns:a="http://schemas.openxmlformats.org/drawingml/2006/main" xmlns:r="http://schemas.openxmlformats.org/officeDocument/2006/relationships" xmlns:p="http://schemas.openxmlformats.org/presentationml/2006/main">
+  <p:cSld>
+    <p:spTree>
+      <p:nvGrpSpPr>
+        <p:cNvPr id="1" name="">
+          <a:extLst>
+            <a:ext uri="{FF2B5EF4-FFF2-40B4-BE49-F238E27FC236}">
+              <a16:creationId xmlns:a16="http://schemas.microsoft.com/office/drawing/2014/main" id="{121A514F-D481-B067-F828-00B5D62A1303}"/>
+            </a:ext>
+          </a:extLst>
+        </p:cNvPr>
+        <p:cNvGrpSpPr/>
+        <p:nvPr/>
+      </p:nvGrpSpPr>
+      <p:grpSpPr>
+        <a:xfrm>
+          <a:off x="0" y="0"/>
+          <a:ext cx="0" cy="0"/>
+          <a:chOff x="0" y="0"/>
+          <a:chExt cx="0" cy="0"/>
+        </a:xfrm>
+      </p:grpSpPr>
+      <p:sp>
+        <p:nvSpPr>
+          <p:cNvPr id="9" name="슬라이드 번호 개체 틀 8">
+            <a:extLst>
+              <a:ext uri="{FF2B5EF4-FFF2-40B4-BE49-F238E27FC236}">
+                <a16:creationId xmlns:a16="http://schemas.microsoft.com/office/drawing/2014/main" id="{792EC581-7CFB-876F-7AC1-CDE2F8111872}"/>
+              </a:ext>
+            </a:extLst>
+          </p:cNvPr>
+          <p:cNvSpPr>
+            <a:spLocks noGrp="1"/>
+          </p:cNvSpPr>
+          <p:nvPr>
+            <p:ph type="sldNum" sz="quarter" idx="4"/>
+          </p:nvPr>
+        </p:nvSpPr>
+        <p:spPr/>
+        <p:txBody>
+          <a:bodyPr/>
+          <a:lstStyle/>
+          <a:p>
+            <a:fld id="{83D7C3DD-38B7-4D6D-B394-0849C77A12EC}" type="slidenum">
+              <a:rPr lang="en-US" smtClean="0">
+                <a:latin typeface="Calibri Light" panose="020F0302020204030204" pitchFamily="34" charset="0"/>
+                <a:cs typeface="Calibri Light" panose="020F0302020204030204" pitchFamily="34" charset="0"/>
+              </a:rPr>
+              <a:pPr/>
+              <a:t>12</a:t>
+            </a:fld>
+            <a:endParaRPr lang="en-US" dirty="0">
+              <a:latin typeface="Calibri Light" panose="020F0302020204030204" pitchFamily="34" charset="0"/>
+              <a:cs typeface="Calibri Light" panose="020F0302020204030204" pitchFamily="34" charset="0"/>
+            </a:endParaRPr>
+          </a:p>
+        </p:txBody>
+      </p:sp>
+      <p:sp>
+        <p:nvSpPr>
+          <p:cNvPr id="3" name="TextBox 2">
+            <a:extLst>
+              <a:ext uri="{FF2B5EF4-FFF2-40B4-BE49-F238E27FC236}">
+                <a16:creationId xmlns:a16="http://schemas.microsoft.com/office/drawing/2014/main" id="{51953B19-86B6-34E3-B23D-DEA5A69124FA}"/>
+              </a:ext>
+            </a:extLst>
+          </p:cNvPr>
+          <p:cNvSpPr txBox="1"/>
+          <p:nvPr/>
+        </p:nvSpPr>
+        <p:spPr>
+          <a:xfrm>
+            <a:off x="182088" y="0"/>
+            <a:ext cx="12009912" cy="498764"/>
+          </a:xfrm>
+          <a:prstGeom prst="rect">
+            <a:avLst/>
+          </a:prstGeom>
+          <a:noFill/>
+        </p:spPr>
+        <p:txBody>
+          <a:bodyPr wrap="square" lIns="36000" tIns="36000" rIns="36000" bIns="36000" rtlCol="0" anchor="ctr" anchorCtr="0">
+            <a:noAutofit/>
+          </a:bodyPr>
+          <a:lstStyle/>
+          <a:p>
+            <a:r>
+              <a:rPr lang="en-US" altLang="ko-KR" b="1" dirty="0">
+                <a:cs typeface="Calibri Light" panose="020F0302020204030204" pitchFamily="34" charset="0"/>
+              </a:rPr>
+              <a:t>MCU</a:t>
+            </a:r>
+            <a:r>
+              <a:rPr lang="ko-KR" altLang="en-US" b="1" dirty="0">
+                <a:cs typeface="Calibri Light" panose="020F0302020204030204" pitchFamily="34" charset="0"/>
+              </a:rPr>
+              <a:t> </a:t>
+            </a:r>
+            <a:r>
+              <a:rPr lang="en-US" altLang="ko-KR" b="1" dirty="0">
+                <a:cs typeface="Calibri Light" panose="020F0302020204030204" pitchFamily="34" charset="0"/>
+              </a:rPr>
+              <a:t>I2C</a:t>
+            </a:r>
+            <a:r>
+              <a:rPr lang="ko-KR" altLang="en-US" b="1" dirty="0">
+                <a:cs typeface="Calibri Light" panose="020F0302020204030204" pitchFamily="34" charset="0"/>
+              </a:rPr>
+              <a:t> </a:t>
+            </a:r>
+            <a:r>
+              <a:rPr lang="en-US" altLang="ko-KR" b="1" dirty="0">
+                <a:cs typeface="Calibri Light" panose="020F0302020204030204" pitchFamily="34" charset="0"/>
+              </a:rPr>
+              <a:t>SCL/SDA </a:t>
+            </a:r>
+            <a:r>
+              <a:rPr lang="ko-KR" altLang="en-US" b="1" dirty="0">
+                <a:cs typeface="Calibri Light" panose="020F0302020204030204" pitchFamily="34" charset="0"/>
+              </a:rPr>
+              <a:t>회로도 </a:t>
+            </a:r>
+            <a:r>
+              <a:rPr lang="en-US" altLang="ko-KR" b="1" dirty="0">
+                <a:cs typeface="Calibri Light" panose="020F0302020204030204" pitchFamily="34" charset="0"/>
+              </a:rPr>
+              <a:t>Net </a:t>
+            </a:r>
+            <a:r>
+              <a:rPr lang="ko-KR" altLang="en-US" b="1" dirty="0">
+                <a:cs typeface="Calibri Light" panose="020F0302020204030204" pitchFamily="34" charset="0"/>
+              </a:rPr>
+              <a:t>연결 반전</a:t>
+            </a:r>
+            <a:endParaRPr lang="en-US" altLang="ko-KR" dirty="0">
+              <a:latin typeface="Arial" panose="020B0604020202020204" pitchFamily="34" charset="0"/>
+              <a:cs typeface="Arial" panose="020B0604020202020204" pitchFamily="34" charset="0"/>
+            </a:endParaRPr>
+          </a:p>
+        </p:txBody>
+      </p:sp>
+      <p:grpSp>
+        <p:nvGrpSpPr>
+          <p:cNvPr id="7" name="그룹 6">
+            <a:extLst>
+              <a:ext uri="{FF2B5EF4-FFF2-40B4-BE49-F238E27FC236}">
+                <a16:creationId xmlns:a16="http://schemas.microsoft.com/office/drawing/2014/main" id="{689630DB-690D-399B-8A60-B9CE8E5D46BF}"/>
+              </a:ext>
+            </a:extLst>
+          </p:cNvPr>
+          <p:cNvGrpSpPr/>
+          <p:nvPr/>
+        </p:nvGrpSpPr>
+        <p:grpSpPr>
+          <a:xfrm>
+            <a:off x="1428079" y="1977735"/>
+            <a:ext cx="9211346" cy="4171478"/>
+            <a:chOff x="559296" y="815691"/>
+            <a:chExt cx="11073407" cy="5406718"/>
+          </a:xfrm>
+        </p:grpSpPr>
+        <p:pic>
+          <p:nvPicPr>
+            <p:cNvPr id="6" name="그림 5">
+              <a:extLst>
+                <a:ext uri="{FF2B5EF4-FFF2-40B4-BE49-F238E27FC236}">
+                  <a16:creationId xmlns:a16="http://schemas.microsoft.com/office/drawing/2014/main" id="{77F98333-81CD-2BE1-7455-84712AAE56F6}"/>
+                </a:ext>
+              </a:extLst>
+            </p:cNvPr>
+            <p:cNvPicPr>
+              <a:picLocks noChangeAspect="1"/>
+            </p:cNvPicPr>
+            <p:nvPr/>
+          </p:nvPicPr>
+          <p:blipFill>
+            <a:blip r:embed="rId2"/>
+            <a:stretch>
+              <a:fillRect/>
+            </a:stretch>
+          </p:blipFill>
+          <p:spPr>
+            <a:xfrm>
+              <a:off x="559296" y="815691"/>
+              <a:ext cx="11073407" cy="3588319"/>
+            </a:xfrm>
+            <a:prstGeom prst="rect">
+              <a:avLst/>
+            </a:prstGeom>
+            <a:ln>
+              <a:solidFill>
+                <a:schemeClr val="accent1"/>
+              </a:solidFill>
+            </a:ln>
+          </p:spPr>
+        </p:pic>
+        <p:sp>
+          <p:nvSpPr>
+            <p:cNvPr id="8" name="타원 7">
+              <a:extLst>
+                <a:ext uri="{FF2B5EF4-FFF2-40B4-BE49-F238E27FC236}">
+                  <a16:creationId xmlns:a16="http://schemas.microsoft.com/office/drawing/2014/main" id="{B22D6B23-9BF4-52AE-C880-8FE31835AA60}"/>
+                </a:ext>
+              </a:extLst>
+            </p:cNvPr>
+            <p:cNvSpPr/>
+            <p:nvPr/>
+          </p:nvSpPr>
+          <p:spPr>
+            <a:xfrm>
+              <a:off x="647699" y="2857500"/>
+              <a:ext cx="600075" cy="342900"/>
+            </a:xfrm>
+            <a:prstGeom prst="ellipse">
+              <a:avLst/>
+            </a:prstGeom>
+            <a:noFill/>
+            <a:ln>
+              <a:solidFill>
+                <a:srgbClr val="00CC99"/>
+              </a:solidFill>
+              <a:prstDash val="sysDash"/>
+            </a:ln>
+          </p:spPr>
+          <p:style>
+            <a:lnRef idx="2">
+              <a:schemeClr val="accent1">
+                <a:shade val="15000"/>
+              </a:schemeClr>
+            </a:lnRef>
+            <a:fillRef idx="1">
+              <a:schemeClr val="accent1"/>
+            </a:fillRef>
+            <a:effectRef idx="0">
+              <a:schemeClr val="accent1"/>
+            </a:effectRef>
+            <a:fontRef idx="minor">
+              <a:schemeClr val="lt1"/>
+            </a:fontRef>
+          </p:style>
+          <p:txBody>
+            <a:bodyPr rtlCol="0" anchor="ctr"/>
+            <a:lstStyle/>
+            <a:p>
+              <a:pPr algn="ctr"/>
+              <a:endParaRPr lang="ko-KR" altLang="en-US"/>
+            </a:p>
+          </p:txBody>
+        </p:sp>
+        <p:sp>
+          <p:nvSpPr>
+            <p:cNvPr id="12" name="타원 11">
+              <a:extLst>
+                <a:ext uri="{FF2B5EF4-FFF2-40B4-BE49-F238E27FC236}">
+                  <a16:creationId xmlns:a16="http://schemas.microsoft.com/office/drawing/2014/main" id="{78BFDE65-D624-6237-AC86-17479E5350DD}"/>
+                </a:ext>
+              </a:extLst>
+            </p:cNvPr>
+            <p:cNvSpPr/>
+            <p:nvPr/>
+          </p:nvSpPr>
+          <p:spPr>
+            <a:xfrm>
+              <a:off x="6772274" y="2552700"/>
+              <a:ext cx="600075" cy="342900"/>
+            </a:xfrm>
+            <a:prstGeom prst="ellipse">
+              <a:avLst/>
+            </a:prstGeom>
+            <a:noFill/>
+            <a:ln>
+              <a:solidFill>
+                <a:srgbClr val="00CC99"/>
+              </a:solidFill>
+              <a:prstDash val="sysDash"/>
+            </a:ln>
+          </p:spPr>
+          <p:style>
+            <a:lnRef idx="2">
+              <a:schemeClr val="accent1">
+                <a:shade val="15000"/>
+              </a:schemeClr>
+            </a:lnRef>
+            <a:fillRef idx="1">
+              <a:schemeClr val="accent1"/>
+            </a:fillRef>
+            <a:effectRef idx="0">
+              <a:schemeClr val="accent1"/>
+            </a:effectRef>
+            <a:fontRef idx="minor">
+              <a:schemeClr val="lt1"/>
+            </a:fontRef>
+          </p:style>
+          <p:txBody>
+            <a:bodyPr rtlCol="0" anchor="ctr"/>
+            <a:lstStyle/>
+            <a:p>
+              <a:pPr algn="ctr"/>
+              <a:endParaRPr lang="ko-KR" altLang="en-US"/>
+            </a:p>
+          </p:txBody>
+        </p:sp>
+        <p:sp>
+          <p:nvSpPr>
+            <p:cNvPr id="14" name="TextBox 13">
+              <a:extLst>
+                <a:ext uri="{FF2B5EF4-FFF2-40B4-BE49-F238E27FC236}">
+                  <a16:creationId xmlns:a16="http://schemas.microsoft.com/office/drawing/2014/main" id="{525A649B-D808-2B6B-9534-7C528C2CD401}"/>
+                </a:ext>
+              </a:extLst>
+            </p:cNvPr>
+            <p:cNvSpPr txBox="1"/>
+            <p:nvPr/>
+          </p:nvSpPr>
+          <p:spPr>
+            <a:xfrm>
+              <a:off x="1984621" y="5479421"/>
+              <a:ext cx="1495349" cy="742988"/>
+            </a:xfrm>
+            <a:prstGeom prst="rect">
+              <a:avLst/>
+            </a:prstGeom>
+            <a:solidFill>
+              <a:srgbClr val="00CC99">
+                <a:alpha val="50000"/>
+              </a:srgbClr>
+            </a:solidFill>
+          </p:spPr>
+          <p:txBody>
+            <a:bodyPr wrap="square" rtlCol="0">
+              <a:spAutoFit/>
+            </a:bodyPr>
+            <a:lstStyle/>
+            <a:p>
+              <a:r>
+                <a:rPr lang="en-US" altLang="ko-KR" sz="1000" b="1" dirty="0"/>
+                <a:t>PB7</a:t>
+              </a:r>
+            </a:p>
+            <a:p>
+              <a:r>
+                <a:rPr lang="en-US" altLang="ko-KR" sz="1000" b="1" dirty="0"/>
+                <a:t>  MCU</a:t>
+              </a:r>
+              <a:r>
+                <a:rPr lang="ko-KR" altLang="en-US" sz="1000" b="1" dirty="0"/>
+                <a:t> </a:t>
+              </a:r>
+              <a:r>
+                <a:rPr lang="en-US" altLang="ko-KR" sz="1000" b="1" dirty="0"/>
+                <a:t>-</a:t>
+              </a:r>
+              <a:r>
+                <a:rPr lang="ko-KR" altLang="en-US" sz="1000" b="1" dirty="0"/>
+                <a:t> </a:t>
+              </a:r>
+              <a:r>
+                <a:rPr lang="en-US" altLang="ko-KR" sz="1000" b="1" dirty="0"/>
+                <a:t>I2C_SDA</a:t>
+              </a:r>
+            </a:p>
+            <a:p>
+              <a:r>
+                <a:rPr lang="ko-KR" altLang="en-US" sz="1000" b="1" dirty="0"/>
+                <a:t>회로도 </a:t>
+              </a:r>
+              <a:r>
+                <a:rPr lang="en-US" altLang="ko-KR" sz="1000" b="1" dirty="0"/>
+                <a:t>– I2C_SCL</a:t>
+              </a:r>
+              <a:endParaRPr lang="ko-KR" altLang="en-US" sz="1000" b="1" dirty="0"/>
+            </a:p>
+          </p:txBody>
+        </p:sp>
+        <p:sp>
+          <p:nvSpPr>
+            <p:cNvPr id="17" name="TextBox 16">
+              <a:extLst>
+                <a:ext uri="{FF2B5EF4-FFF2-40B4-BE49-F238E27FC236}">
+                  <a16:creationId xmlns:a16="http://schemas.microsoft.com/office/drawing/2014/main" id="{C64DF724-1439-34DA-E96F-FBD3B8BA627D}"/>
+                </a:ext>
+              </a:extLst>
+            </p:cNvPr>
+            <p:cNvSpPr txBox="1"/>
+            <p:nvPr/>
+          </p:nvSpPr>
+          <p:spPr>
+            <a:xfrm>
+              <a:off x="6499527" y="5400676"/>
+              <a:ext cx="1495349" cy="718045"/>
+            </a:xfrm>
+            <a:prstGeom prst="rect">
+              <a:avLst/>
+            </a:prstGeom>
+            <a:solidFill>
+              <a:srgbClr val="00CC99">
+                <a:alpha val="50000"/>
+              </a:srgbClr>
+            </a:solidFill>
+          </p:spPr>
+          <p:txBody>
+            <a:bodyPr wrap="square" rtlCol="0">
+              <a:spAutoFit/>
+            </a:bodyPr>
+            <a:lstStyle>
+              <a:defPPr>
+                <a:defRPr lang="ko-KR"/>
+              </a:defPPr>
+              <a:lvl1pPr>
+                <a:defRPr sz="1000" b="1"/>
+              </a:lvl1pPr>
+            </a:lstStyle>
+            <a:p>
+              <a:r>
+                <a:rPr lang="en-US" altLang="ko-KR" dirty="0"/>
+                <a:t>PB6</a:t>
+              </a:r>
+            </a:p>
+            <a:p>
+              <a:r>
+                <a:rPr lang="en-US" altLang="ko-KR" dirty="0"/>
+                <a:t>  </a:t>
+              </a:r>
+              <a:r>
+                <a:rPr lang="en-US" altLang="ko-KR"/>
+                <a:t>MCU</a:t>
+              </a:r>
+              <a:r>
+                <a:rPr lang="ko-KR" altLang="en-US"/>
+                <a:t> </a:t>
+              </a:r>
+              <a:r>
+                <a:rPr lang="en-US" altLang="ko-KR"/>
+                <a:t>-</a:t>
+              </a:r>
+              <a:r>
+                <a:rPr lang="ko-KR" altLang="en-US"/>
+                <a:t> </a:t>
+              </a:r>
+              <a:r>
+                <a:rPr lang="en-US" altLang="ko-KR" dirty="0"/>
+                <a:t>I2C_SCL</a:t>
+              </a:r>
+            </a:p>
+            <a:p>
+              <a:r>
+                <a:rPr lang="ko-KR" altLang="en-US"/>
+                <a:t>회로도 </a:t>
+              </a:r>
+              <a:r>
+                <a:rPr lang="en-US" altLang="ko-KR" dirty="0"/>
+                <a:t>– I2C_SDA</a:t>
+              </a:r>
+              <a:endParaRPr lang="ko-KR" altLang="en-US" dirty="0"/>
+            </a:p>
+          </p:txBody>
+        </p:sp>
+        <p:pic>
+          <p:nvPicPr>
+            <p:cNvPr id="19" name="그림 18">
+              <a:extLst>
+                <a:ext uri="{FF2B5EF4-FFF2-40B4-BE49-F238E27FC236}">
+                  <a16:creationId xmlns:a16="http://schemas.microsoft.com/office/drawing/2014/main" id="{288535A8-455B-7E34-08D7-2A5FF0ACC599}"/>
+                </a:ext>
+              </a:extLst>
+            </p:cNvPr>
+            <p:cNvPicPr>
+              <a:picLocks noChangeAspect="1"/>
+            </p:cNvPicPr>
+            <p:nvPr/>
+          </p:nvPicPr>
+          <p:blipFill>
+            <a:blip r:embed="rId3"/>
+            <a:stretch>
+              <a:fillRect/>
+            </a:stretch>
+          </p:blipFill>
+          <p:spPr>
+            <a:xfrm>
+              <a:off x="4474665" y="4843983"/>
+              <a:ext cx="1771741" cy="742988"/>
+            </a:xfrm>
+            <a:prstGeom prst="rect">
+              <a:avLst/>
+            </a:prstGeom>
+            <a:ln>
+              <a:solidFill>
+                <a:schemeClr val="accent1"/>
+              </a:solidFill>
+            </a:ln>
+          </p:spPr>
+        </p:pic>
+        <p:cxnSp>
+          <p:nvCxnSpPr>
+            <p:cNvPr id="21" name="연결선: 꺾임 20">
+              <a:extLst>
+                <a:ext uri="{FF2B5EF4-FFF2-40B4-BE49-F238E27FC236}">
+                  <a16:creationId xmlns:a16="http://schemas.microsoft.com/office/drawing/2014/main" id="{ED365BB4-837A-C994-FAEA-33EBAA564059}"/>
+                </a:ext>
+              </a:extLst>
+            </p:cNvPr>
+            <p:cNvCxnSpPr>
+              <a:cxnSpLocks/>
+            </p:cNvCxnSpPr>
+            <p:nvPr/>
+          </p:nvCxnSpPr>
+          <p:spPr>
+            <a:xfrm>
+              <a:off x="947736" y="3200400"/>
+              <a:ext cx="3452814" cy="2200275"/>
+            </a:xfrm>
+            <a:prstGeom prst="bentConnector3">
+              <a:avLst>
+                <a:gd name="adj1" fmla="val -207"/>
+              </a:avLst>
+            </a:prstGeom>
+            <a:ln>
+              <a:solidFill>
+                <a:srgbClr val="00CC99"/>
+              </a:solidFill>
+              <a:tailEnd type="triangle"/>
+            </a:ln>
+          </p:spPr>
+          <p:style>
+            <a:lnRef idx="2">
+              <a:schemeClr val="accent1"/>
+            </a:lnRef>
+            <a:fillRef idx="0">
+              <a:schemeClr val="accent1"/>
+            </a:fillRef>
+            <a:effectRef idx="1">
+              <a:schemeClr val="accent1"/>
+            </a:effectRef>
+            <a:fontRef idx="minor">
+              <a:schemeClr val="tx1"/>
+            </a:fontRef>
+          </p:style>
+        </p:cxnSp>
+        <p:cxnSp>
+          <p:nvCxnSpPr>
+            <p:cNvPr id="25" name="연결선: 꺾임 24">
+              <a:extLst>
+                <a:ext uri="{FF2B5EF4-FFF2-40B4-BE49-F238E27FC236}">
+                  <a16:creationId xmlns:a16="http://schemas.microsoft.com/office/drawing/2014/main" id="{7EC52AA0-10A0-497F-D322-67F0E2D3980F}"/>
+                </a:ext>
+              </a:extLst>
+            </p:cNvPr>
+            <p:cNvCxnSpPr>
+              <a:cxnSpLocks/>
+            </p:cNvCxnSpPr>
+            <p:nvPr/>
+          </p:nvCxnSpPr>
+          <p:spPr>
+            <a:xfrm rot="5400000">
+              <a:off x="5536479" y="3679644"/>
+              <a:ext cx="2319877" cy="751789"/>
+            </a:xfrm>
+            <a:prstGeom prst="bentConnector3">
+              <a:avLst>
+                <a:gd name="adj1" fmla="val 100091"/>
+              </a:avLst>
+            </a:prstGeom>
+            <a:ln>
+              <a:solidFill>
+                <a:srgbClr val="00CC99"/>
+              </a:solidFill>
+              <a:tailEnd type="triangle"/>
+            </a:ln>
+          </p:spPr>
+          <p:style>
+            <a:lnRef idx="2">
+              <a:schemeClr val="accent1"/>
+            </a:lnRef>
+            <a:fillRef idx="0">
+              <a:schemeClr val="accent1"/>
+            </a:fillRef>
+            <a:effectRef idx="1">
+              <a:schemeClr val="accent1"/>
+            </a:effectRef>
+            <a:fontRef idx="minor">
+              <a:schemeClr val="tx1"/>
+            </a:fontRef>
+          </p:style>
+        </p:cxnSp>
+        <p:sp>
+          <p:nvSpPr>
+            <p:cNvPr id="2" name="TextBox 1">
+              <a:extLst>
+                <a:ext uri="{FF2B5EF4-FFF2-40B4-BE49-F238E27FC236}">
+                  <a16:creationId xmlns:a16="http://schemas.microsoft.com/office/drawing/2014/main" id="{A526C481-8A81-5A2E-EDBC-E3EFEFCAB4E2}"/>
+                </a:ext>
+              </a:extLst>
+            </p:cNvPr>
+            <p:cNvSpPr txBox="1"/>
+            <p:nvPr/>
+          </p:nvSpPr>
+          <p:spPr>
+            <a:xfrm>
+              <a:off x="4677312" y="4532744"/>
+              <a:ext cx="1335622" cy="276999"/>
+            </a:xfrm>
+            <a:prstGeom prst="rect">
+              <a:avLst/>
+            </a:prstGeom>
+            <a:noFill/>
+          </p:spPr>
+          <p:txBody>
+            <a:bodyPr wrap="none" rtlCol="0">
+              <a:spAutoFit/>
+            </a:bodyPr>
+            <a:lstStyle/>
+            <a:p>
+              <a:r>
+                <a:rPr lang="en-US" altLang="ko-KR" sz="1200" b="1" dirty="0"/>
+                <a:t>&lt;MCU</a:t>
+              </a:r>
+              <a:r>
+                <a:rPr lang="ko-KR" altLang="en-US" sz="1200" b="1" dirty="0"/>
+                <a:t> 핀 할당</a:t>
+              </a:r>
+              <a:r>
+                <a:rPr lang="en-US" altLang="ko-KR" sz="1200" b="1" dirty="0"/>
+                <a:t>&gt;</a:t>
+              </a:r>
+              <a:endParaRPr lang="ko-KR" altLang="en-US" sz="1200" b="1" dirty="0"/>
+            </a:p>
+          </p:txBody>
+        </p:sp>
+      </p:grpSp>
+      <p:sp>
+        <p:nvSpPr>
+          <p:cNvPr id="11" name="TextBox 10">
+            <a:extLst>
+              <a:ext uri="{FF2B5EF4-FFF2-40B4-BE49-F238E27FC236}">
+                <a16:creationId xmlns:a16="http://schemas.microsoft.com/office/drawing/2014/main" id="{A11488BB-63D2-B07F-06BA-01F756AFD16C}"/>
+              </a:ext>
+            </a:extLst>
+          </p:cNvPr>
+          <p:cNvSpPr txBox="1"/>
+          <p:nvPr/>
+        </p:nvSpPr>
+        <p:spPr>
+          <a:xfrm>
+            <a:off x="392581" y="630922"/>
+            <a:ext cx="2659702" cy="985911"/>
+          </a:xfrm>
+          <a:prstGeom prst="rect">
+            <a:avLst/>
+          </a:prstGeom>
+          <a:noFill/>
+        </p:spPr>
+        <p:txBody>
+          <a:bodyPr wrap="none" rtlCol="0">
+            <a:spAutoFit/>
+          </a:bodyPr>
+          <a:lstStyle/>
+          <a:p>
+            <a:pPr>
+              <a:lnSpc>
+                <a:spcPct val="150000"/>
+              </a:lnSpc>
+            </a:pPr>
+            <a:r>
+              <a:rPr lang="ko-KR" altLang="en-US" sz="1000" dirty="0"/>
+              <a:t>개선 전</a:t>
+            </a:r>
+            <a:endParaRPr lang="en-US" altLang="ko-KR" sz="1000" dirty="0"/>
+          </a:p>
+          <a:p>
+            <a:pPr>
+              <a:lnSpc>
+                <a:spcPct val="150000"/>
+              </a:lnSpc>
+            </a:pPr>
+            <a:r>
+              <a:rPr lang="en-US" altLang="ko-KR" sz="1000" dirty="0"/>
+              <a:t> - </a:t>
+            </a:r>
+            <a:r>
+              <a:rPr lang="ko-KR" altLang="en-US" sz="1000" dirty="0"/>
+              <a:t>회로도상 </a:t>
+            </a:r>
+            <a:r>
+              <a:rPr lang="en-US" altLang="ko-KR" sz="1000" dirty="0"/>
+              <a:t>SCL</a:t>
+            </a:r>
+            <a:r>
+              <a:rPr lang="ko-KR" altLang="en-US" sz="1000" dirty="0"/>
+              <a:t>과 </a:t>
+            </a:r>
+            <a:r>
+              <a:rPr lang="en-US" altLang="ko-KR" sz="1000" dirty="0"/>
+              <a:t>SDA Net</a:t>
+            </a:r>
+            <a:r>
+              <a:rPr lang="ko-KR" altLang="en-US" sz="1000" dirty="0"/>
+              <a:t>이 교차 연결됨</a:t>
+            </a:r>
+            <a:r>
+              <a:rPr lang="en-US" altLang="ko-KR" sz="1000" dirty="0"/>
+              <a:t>.</a:t>
+            </a:r>
+            <a:br>
+              <a:rPr lang="en-US" altLang="ko-KR" sz="1000" dirty="0"/>
+            </a:br>
+            <a:r>
+              <a:rPr lang="ko-KR" altLang="en-US" sz="1000" dirty="0"/>
+              <a:t>개선 후</a:t>
+            </a:r>
+            <a:endParaRPr lang="en-US" altLang="ko-KR" sz="1000" dirty="0"/>
+          </a:p>
+          <a:p>
+            <a:pPr>
+              <a:lnSpc>
+                <a:spcPct val="150000"/>
+              </a:lnSpc>
+            </a:pPr>
+            <a:r>
+              <a:rPr lang="en-US" altLang="ko-KR" sz="1000" dirty="0"/>
+              <a:t> - PCB </a:t>
+            </a:r>
+            <a:r>
+              <a:rPr lang="ko-KR" altLang="en-US" sz="1000" dirty="0"/>
+              <a:t>패턴에서 </a:t>
+            </a:r>
+            <a:r>
+              <a:rPr lang="en-US" altLang="ko-KR" sz="1000" dirty="0"/>
+              <a:t>SCL/SDA </a:t>
+            </a:r>
+            <a:r>
+              <a:rPr lang="ko-KR" altLang="en-US" sz="1000" dirty="0"/>
+              <a:t>연결을 수정함</a:t>
+            </a:r>
+            <a:r>
+              <a:rPr lang="en-US" altLang="ko-KR" sz="1000" dirty="0"/>
+              <a:t>.</a:t>
+            </a:r>
+            <a:endParaRPr lang="ko-KR" altLang="en-US" sz="1000" dirty="0"/>
+          </a:p>
+        </p:txBody>
+      </p:sp>
+    </p:spTree>
+    <p:extLst>
+      <p:ext uri="{BB962C8B-B14F-4D97-AF65-F5344CB8AC3E}">
+        <p14:creationId xmlns:p14="http://schemas.microsoft.com/office/powerpoint/2010/main" val="4144612521"/>
+      </p:ext>
+    </p:extLst>
+  </p:cSld>
+  <p:clrMapOvr>
+    <a:masterClrMapping/>
+  </p:clrMapOvr>
+</p:sld>
+</file>
+
+<file path=ppt/slides/slide13.xml><?xml version="1.0" encoding="utf-8"?>
+<p:sld xmlns:a="http://schemas.openxmlformats.org/drawingml/2006/main" xmlns:r="http://schemas.openxmlformats.org/officeDocument/2006/relationships" xmlns:p="http://schemas.openxmlformats.org/presentationml/2006/main">
+  <p:cSld>
+    <p:spTree>
+      <p:nvGrpSpPr>
+        <p:cNvPr id="1" name="">
+          <a:extLst>
+            <a:ext uri="{FF2B5EF4-FFF2-40B4-BE49-F238E27FC236}">
               <a16:creationId xmlns:a16="http://schemas.microsoft.com/office/drawing/2014/main" id="{09B4E255-DC4C-EEBB-F164-3348F0DC9BC3}"/>
             </a:ext>
           </a:extLst>
@@ -4034,7 +5450,7 @@
 </p:sld>
 </file>
 
-<file path=ppt/slides/slide11.xml><?xml version="1.0" encoding="utf-8"?>
+<file path=ppt/slides/slide14.xml><?xml version="1.0" encoding="utf-8"?>
 <p:sld xmlns:a="http://schemas.openxmlformats.org/drawingml/2006/main" xmlns:r="http://schemas.openxmlformats.org/officeDocument/2006/relationships" xmlns:p="http://schemas.openxmlformats.org/presentationml/2006/main">
   <p:cSld>
     <p:spTree>
@@ -4084,7 +5500,7 @@
                 <a:cs typeface="Calibri Light" panose="020F0302020204030204" pitchFamily="34" charset="0"/>
               </a:rPr>
               <a:pPr/>
-              <a:t>11</a:t>
+              <a:t>14</a:t>
             </a:fld>
             <a:endParaRPr lang="en-US" dirty="0">
               <a:latin typeface="Calibri Light" panose="020F0302020204030204" pitchFamily="34" charset="0"/>
@@ -4478,6 +5894,52 @@
           </a:p>
         </p:txBody>
       </p:sp>
+      <p:sp>
+        <p:nvSpPr>
+          <p:cNvPr id="2" name="TextBox 1">
+            <a:extLst>
+              <a:ext uri="{FF2B5EF4-FFF2-40B4-BE49-F238E27FC236}">
+                <a16:creationId xmlns:a16="http://schemas.microsoft.com/office/drawing/2014/main" id="{6B9987CF-5981-1B92-D42E-17E72DB4B9FF}"/>
+              </a:ext>
+            </a:extLst>
+          </p:cNvPr>
+          <p:cNvSpPr txBox="1"/>
+          <p:nvPr/>
+        </p:nvSpPr>
+        <p:spPr>
+          <a:xfrm>
+            <a:off x="228082" y="596135"/>
+            <a:ext cx="2295821" cy="246221"/>
+          </a:xfrm>
+          <a:prstGeom prst="rect">
+            <a:avLst/>
+          </a:prstGeom>
+          <a:noFill/>
+        </p:spPr>
+        <p:txBody>
+          <a:bodyPr wrap="none" rtlCol="0">
+            <a:spAutoFit/>
+          </a:bodyPr>
+          <a:lstStyle/>
+          <a:p>
+            <a:r>
+              <a:rPr lang="en-US" altLang="ko-KR" sz="1000" dirty="0"/>
+              <a:t>Boot Sequence (SIO1, MCU </a:t>
+            </a:r>
+            <a:r>
+              <a:rPr lang="en-US" altLang="ko-KR" sz="1000" dirty="0">
+                <a:sym typeface="Wingdings" panose="05000000000000000000" pitchFamily="2" charset="2"/>
+              </a:rPr>
+              <a:t></a:t>
+            </a:r>
+            <a:r>
+              <a:rPr lang="en-US" altLang="ko-KR" sz="1000" dirty="0"/>
+              <a:t> I2C)</a:t>
+            </a:r>
+            <a:endParaRPr lang="ko-KR" altLang="en-US" sz="1000" dirty="0"/>
+          </a:p>
+        </p:txBody>
+      </p:sp>
     </p:spTree>
     <p:extLst>
       <p:ext uri="{BB962C8B-B14F-4D97-AF65-F5344CB8AC3E}">
@@ -4491,7 +5953,7 @@
 </p:sld>
 </file>
 
-<file path=ppt/slides/slide12.xml><?xml version="1.0" encoding="utf-8"?>
+<file path=ppt/slides/slide15.xml><?xml version="1.0" encoding="utf-8"?>
 <p:sld xmlns:a="http://schemas.openxmlformats.org/drawingml/2006/main" xmlns:r="http://schemas.openxmlformats.org/officeDocument/2006/relationships" xmlns:p="http://schemas.openxmlformats.org/presentationml/2006/main">
   <p:cSld>
     <p:spTree>
@@ -4541,7 +6003,7 @@
                 <a:cs typeface="Calibri Light" panose="020F0302020204030204" pitchFamily="34" charset="0"/>
               </a:rPr>
               <a:pPr/>
-              <a:t>12</a:t>
+              <a:t>15</a:t>
             </a:fld>
             <a:endParaRPr lang="en-US" dirty="0">
               <a:latin typeface="Calibri Light" panose="020F0302020204030204" pitchFamily="34" charset="0"/>
@@ -4934,6 +6396,42 @@
           </a:p>
         </p:txBody>
       </p:sp>
+      <p:sp>
+        <p:nvSpPr>
+          <p:cNvPr id="8" name="TextBox 7">
+            <a:extLst>
+              <a:ext uri="{FF2B5EF4-FFF2-40B4-BE49-F238E27FC236}">
+                <a16:creationId xmlns:a16="http://schemas.microsoft.com/office/drawing/2014/main" id="{BF09A37E-8E31-2A14-48E7-4DDA8AC93E46}"/>
+              </a:ext>
+            </a:extLst>
+          </p:cNvPr>
+          <p:cNvSpPr txBox="1"/>
+          <p:nvPr/>
+        </p:nvSpPr>
+        <p:spPr>
+          <a:xfrm>
+            <a:off x="228082" y="596135"/>
+            <a:ext cx="1760418" cy="246221"/>
+          </a:xfrm>
+          <a:prstGeom prst="rect">
+            <a:avLst/>
+          </a:prstGeom>
+          <a:noFill/>
+        </p:spPr>
+        <p:txBody>
+          <a:bodyPr wrap="none" rtlCol="0">
+            <a:spAutoFit/>
+          </a:bodyPr>
+          <a:lstStyle/>
+          <a:p>
+            <a:r>
+              <a:rPr lang="en-US" altLang="ko-KR" sz="1000" dirty="0"/>
+              <a:t>Boot Sequence (SIO2, EOL)</a:t>
+            </a:r>
+            <a:endParaRPr lang="ko-KR" altLang="en-US" sz="1000" dirty="0"/>
+          </a:p>
+        </p:txBody>
+      </p:sp>
     </p:spTree>
     <p:extLst>
       <p:ext uri="{BB962C8B-B14F-4D97-AF65-F5344CB8AC3E}">
@@ -4947,7 +6445,7 @@
 </p:sld>
 </file>
 
-<file path=ppt/slides/slide13.xml><?xml version="1.0" encoding="utf-8"?>
+<file path=ppt/slides/slide16.xml><?xml version="1.0" encoding="utf-8"?>
 <p:sld xmlns:a="http://schemas.openxmlformats.org/drawingml/2006/main" xmlns:r="http://schemas.openxmlformats.org/officeDocument/2006/relationships" xmlns:p="http://schemas.openxmlformats.org/presentationml/2006/main">
   <p:cSld>
     <p:spTree>
@@ -5034,6 +6532,1919 @@
         <p:cNvPr id="1" name="">
           <a:extLst>
             <a:ext uri="{FF2B5EF4-FFF2-40B4-BE49-F238E27FC236}">
+              <a16:creationId xmlns:a16="http://schemas.microsoft.com/office/drawing/2014/main" id="{9F6A6EC9-409A-94A0-D4C9-20AE66A7805D}"/>
+            </a:ext>
+          </a:extLst>
+        </p:cNvPr>
+        <p:cNvGrpSpPr/>
+        <p:nvPr/>
+      </p:nvGrpSpPr>
+      <p:grpSpPr>
+        <a:xfrm>
+          <a:off x="0" y="0"/>
+          <a:ext cx="0" cy="0"/>
+          <a:chOff x="0" y="0"/>
+          <a:chExt cx="0" cy="0"/>
+        </a:xfrm>
+      </p:grpSpPr>
+      <p:sp>
+        <p:nvSpPr>
+          <p:cNvPr id="9" name="슬라이드 번호 개체 틀 8">
+            <a:extLst>
+              <a:ext uri="{FF2B5EF4-FFF2-40B4-BE49-F238E27FC236}">
+                <a16:creationId xmlns:a16="http://schemas.microsoft.com/office/drawing/2014/main" id="{CAE2FB7E-FBF4-D748-8DE0-5561383B0EA1}"/>
+              </a:ext>
+            </a:extLst>
+          </p:cNvPr>
+          <p:cNvSpPr>
+            <a:spLocks noGrp="1"/>
+          </p:cNvSpPr>
+          <p:nvPr>
+            <p:ph type="sldNum" sz="quarter" idx="4"/>
+          </p:nvPr>
+        </p:nvSpPr>
+        <p:spPr/>
+        <p:txBody>
+          <a:bodyPr/>
+          <a:lstStyle/>
+          <a:p>
+            <a:fld id="{83D7C3DD-38B7-4D6D-B394-0849C77A12EC}" type="slidenum">
+              <a:rPr lang="en-US" smtClean="0">
+                <a:latin typeface="Calibri Light" panose="020F0302020204030204" pitchFamily="34" charset="0"/>
+                <a:cs typeface="Calibri Light" panose="020F0302020204030204" pitchFamily="34" charset="0"/>
+              </a:rPr>
+              <a:pPr/>
+              <a:t>2</a:t>
+            </a:fld>
+            <a:endParaRPr lang="en-US" dirty="0">
+              <a:latin typeface="Calibri Light" panose="020F0302020204030204" pitchFamily="34" charset="0"/>
+              <a:cs typeface="Calibri Light" panose="020F0302020204030204" pitchFamily="34" charset="0"/>
+            </a:endParaRPr>
+          </a:p>
+        </p:txBody>
+      </p:sp>
+      <p:sp>
+        <p:nvSpPr>
+          <p:cNvPr id="3" name="TextBox 2">
+            <a:extLst>
+              <a:ext uri="{FF2B5EF4-FFF2-40B4-BE49-F238E27FC236}">
+                <a16:creationId xmlns:a16="http://schemas.microsoft.com/office/drawing/2014/main" id="{8BEA89E1-9DDC-AD73-9255-F86D7D7508EF}"/>
+              </a:ext>
+            </a:extLst>
+          </p:cNvPr>
+          <p:cNvSpPr txBox="1"/>
+          <p:nvPr/>
+        </p:nvSpPr>
+        <p:spPr>
+          <a:xfrm>
+            <a:off x="182088" y="0"/>
+            <a:ext cx="12009912" cy="498764"/>
+          </a:xfrm>
+          <a:prstGeom prst="rect">
+            <a:avLst/>
+          </a:prstGeom>
+          <a:noFill/>
+        </p:spPr>
+        <p:txBody>
+          <a:bodyPr wrap="square" lIns="36000" tIns="36000" rIns="36000" bIns="36000" rtlCol="0" anchor="ctr" anchorCtr="0">
+            <a:noAutofit/>
+          </a:bodyPr>
+          <a:lstStyle/>
+          <a:p>
+            <a:r>
+              <a:rPr lang="en-US" altLang="ko-KR" b="1" dirty="0">
+                <a:latin typeface="Calibri Light" panose="020F0302020204030204" pitchFamily="34" charset="0"/>
+                <a:cs typeface="Calibri Light" panose="020F0302020204030204" pitchFamily="34" charset="0"/>
+              </a:rPr>
+              <a:t>Issue</a:t>
+            </a:r>
+            <a:r>
+              <a:rPr lang="ko-KR" altLang="en-US" b="1" dirty="0">
+                <a:latin typeface="Calibri Light" panose="020F0302020204030204" pitchFamily="34" charset="0"/>
+                <a:cs typeface="Calibri Light" panose="020F0302020204030204" pitchFamily="34" charset="0"/>
+              </a:rPr>
+              <a:t> </a:t>
+            </a:r>
+            <a:r>
+              <a:rPr lang="en-US" altLang="ko-KR" b="1" dirty="0">
+                <a:latin typeface="Calibri Light" panose="020F0302020204030204" pitchFamily="34" charset="0"/>
+                <a:cs typeface="Calibri Light" panose="020F0302020204030204" pitchFamily="34" charset="0"/>
+              </a:rPr>
+              <a:t>Summary</a:t>
+            </a:r>
+            <a:endParaRPr lang="en-US" altLang="ko-KR" dirty="0">
+              <a:latin typeface="Arial" panose="020B0604020202020204" pitchFamily="34" charset="0"/>
+              <a:cs typeface="Arial" panose="020B0604020202020204" pitchFamily="34" charset="0"/>
+            </a:endParaRPr>
+          </a:p>
+        </p:txBody>
+      </p:sp>
+      <p:graphicFrame>
+        <p:nvGraphicFramePr>
+          <p:cNvPr id="11" name="표 10">
+            <a:extLst>
+              <a:ext uri="{FF2B5EF4-FFF2-40B4-BE49-F238E27FC236}">
+                <a16:creationId xmlns:a16="http://schemas.microsoft.com/office/drawing/2014/main" id="{9E6AD851-7ECB-1185-7D5C-F9A82774ED34}"/>
+              </a:ext>
+            </a:extLst>
+          </p:cNvPr>
+          <p:cNvGraphicFramePr>
+            <a:graphicFrameLocks noGrp="1"/>
+          </p:cNvGraphicFramePr>
+          <p:nvPr>
+            <p:extLst>
+              <p:ext uri="{D42A27DB-BD31-4B8C-83A1-F6EECF244321}">
+                <p14:modId xmlns:p14="http://schemas.microsoft.com/office/powerpoint/2010/main" val="499491451"/>
+              </p:ext>
+            </p:extLst>
+          </p:nvPr>
+        </p:nvGraphicFramePr>
+        <p:xfrm>
+          <a:off x="310119" y="1005416"/>
+          <a:ext cx="11438411" cy="1854200"/>
+        </p:xfrm>
+        <a:graphic>
+          <a:graphicData uri="http://schemas.openxmlformats.org/drawingml/2006/table">
+            <a:tbl>
+              <a:tblPr firstRow="1" bandRow="1">
+                <a:tableStyleId>{5C22544A-7EE6-4342-B048-85BDC9FD1C3A}</a:tableStyleId>
+              </a:tblPr>
+              <a:tblGrid>
+                <a:gridCol w="1023381">
+                  <a:extLst>
+                    <a:ext uri="{9D8B030D-6E8A-4147-A177-3AD203B41FA5}">
+                      <a16:colId xmlns:a16="http://schemas.microsoft.com/office/drawing/2014/main" val="3740590380"/>
+                    </a:ext>
+                  </a:extLst>
+                </a:gridCol>
+                <a:gridCol w="6496050">
+                  <a:extLst>
+                    <a:ext uri="{9D8B030D-6E8A-4147-A177-3AD203B41FA5}">
+                      <a16:colId xmlns:a16="http://schemas.microsoft.com/office/drawing/2014/main" val="1446023531"/>
+                    </a:ext>
+                  </a:extLst>
+                </a:gridCol>
+                <a:gridCol w="2828925">
+                  <a:extLst>
+                    <a:ext uri="{9D8B030D-6E8A-4147-A177-3AD203B41FA5}">
+                      <a16:colId xmlns:a16="http://schemas.microsoft.com/office/drawing/2014/main" val="2802640158"/>
+                    </a:ext>
+                  </a:extLst>
+                </a:gridCol>
+                <a:gridCol w="1090055">
+                  <a:extLst>
+                    <a:ext uri="{9D8B030D-6E8A-4147-A177-3AD203B41FA5}">
+                      <a16:colId xmlns:a16="http://schemas.microsoft.com/office/drawing/2014/main" val="3376664689"/>
+                    </a:ext>
+                  </a:extLst>
+                </a:gridCol>
+              </a:tblGrid>
+              <a:tr h="370840">
+                <a:tc>
+                  <a:txBody>
+                    <a:bodyPr/>
+                    <a:lstStyle/>
+                    <a:p>
+                      <a:pPr algn="ctr" latinLnBrk="1">
+                        <a:lnSpc>
+                          <a:spcPct val="150000"/>
+                        </a:lnSpc>
+                      </a:pPr>
+                      <a:r>
+                        <a:rPr lang="en-US" altLang="ko-KR" sz="1200" dirty="0">
+                          <a:solidFill>
+                            <a:schemeClr val="tx1"/>
+                          </a:solidFill>
+                          <a:latin typeface="+mn-lt"/>
+                        </a:rPr>
+                        <a:t>Issue No.</a:t>
+                      </a:r>
+                      <a:endParaRPr lang="ko-KR" altLang="en-US" sz="1200" dirty="0">
+                        <a:solidFill>
+                          <a:schemeClr val="tx1"/>
+                        </a:solidFill>
+                        <a:latin typeface="+mn-lt"/>
+                      </a:endParaRPr>
+                    </a:p>
+                  </a:txBody>
+                  <a:tcPr anchor="ctr">
+                    <a:lnL w="12700" cap="flat" cmpd="sng" algn="ctr">
+                      <a:solidFill>
+                        <a:schemeClr val="tx1"/>
+                      </a:solidFill>
+                      <a:prstDash val="solid"/>
+                      <a:round/>
+                      <a:headEnd type="none" w="med" len="med"/>
+                      <a:tailEnd type="none" w="med" len="med"/>
+                    </a:lnL>
+                    <a:lnR w="12700" cap="flat" cmpd="sng" algn="ctr">
+                      <a:solidFill>
+                        <a:schemeClr val="tx1"/>
+                      </a:solidFill>
+                      <a:prstDash val="solid"/>
+                      <a:round/>
+                      <a:headEnd type="none" w="med" len="med"/>
+                      <a:tailEnd type="none" w="med" len="med"/>
+                    </a:lnR>
+                    <a:lnT w="12700" cap="flat" cmpd="sng" algn="ctr">
+                      <a:solidFill>
+                        <a:schemeClr val="tx1"/>
+                      </a:solidFill>
+                      <a:prstDash val="solid"/>
+                      <a:round/>
+                      <a:headEnd type="none" w="med" len="med"/>
+                      <a:tailEnd type="none" w="med" len="med"/>
+                    </a:lnT>
+                    <a:lnB w="12700" cap="flat" cmpd="sng" algn="ctr">
+                      <a:solidFill>
+                        <a:schemeClr val="tx1"/>
+                      </a:solidFill>
+                      <a:prstDash val="solid"/>
+                      <a:round/>
+                      <a:headEnd type="none" w="med" len="med"/>
+                      <a:tailEnd type="none" w="med" len="med"/>
+                    </a:lnB>
+                    <a:solidFill>
+                      <a:schemeClr val="bg2">
+                        <a:lumMod val="90000"/>
+                      </a:schemeClr>
+                    </a:solidFill>
+                  </a:tcPr>
+                </a:tc>
+                <a:tc>
+                  <a:txBody>
+                    <a:bodyPr/>
+                    <a:lstStyle/>
+                    <a:p>
+                      <a:pPr algn="ctr" latinLnBrk="1">
+                        <a:lnSpc>
+                          <a:spcPct val="150000"/>
+                        </a:lnSpc>
+                      </a:pPr>
+                      <a:r>
+                        <a:rPr lang="ko-KR" altLang="en-US" sz="1200" dirty="0">
+                          <a:solidFill>
+                            <a:schemeClr val="tx1"/>
+                          </a:solidFill>
+                          <a:latin typeface="+mn-lt"/>
+                        </a:rPr>
+                        <a:t>내용</a:t>
+                      </a:r>
+                    </a:p>
+                  </a:txBody>
+                  <a:tcPr anchor="ctr">
+                    <a:lnL w="12700" cap="flat" cmpd="sng" algn="ctr">
+                      <a:solidFill>
+                        <a:schemeClr val="tx1"/>
+                      </a:solidFill>
+                      <a:prstDash val="solid"/>
+                      <a:round/>
+                      <a:headEnd type="none" w="med" len="med"/>
+                      <a:tailEnd type="none" w="med" len="med"/>
+                    </a:lnL>
+                    <a:lnR w="12700" cap="flat" cmpd="sng" algn="ctr">
+                      <a:solidFill>
+                        <a:schemeClr val="tx1"/>
+                      </a:solidFill>
+                      <a:prstDash val="solid"/>
+                      <a:round/>
+                      <a:headEnd type="none" w="med" len="med"/>
+                      <a:tailEnd type="none" w="med" len="med"/>
+                    </a:lnR>
+                    <a:lnT w="12700" cap="flat" cmpd="sng" algn="ctr">
+                      <a:solidFill>
+                        <a:schemeClr val="tx1"/>
+                      </a:solidFill>
+                      <a:prstDash val="solid"/>
+                      <a:round/>
+                      <a:headEnd type="none" w="med" len="med"/>
+                      <a:tailEnd type="none" w="med" len="med"/>
+                    </a:lnT>
+                    <a:lnB w="12700" cap="flat" cmpd="sng" algn="ctr">
+                      <a:solidFill>
+                        <a:schemeClr val="tx1"/>
+                      </a:solidFill>
+                      <a:prstDash val="solid"/>
+                      <a:round/>
+                      <a:headEnd type="none" w="med" len="med"/>
+                      <a:tailEnd type="none" w="med" len="med"/>
+                    </a:lnB>
+                    <a:solidFill>
+                      <a:schemeClr val="bg2">
+                        <a:lumMod val="90000"/>
+                      </a:schemeClr>
+                    </a:solidFill>
+                  </a:tcPr>
+                </a:tc>
+                <a:tc>
+                  <a:txBody>
+                    <a:bodyPr/>
+                    <a:lstStyle/>
+                    <a:p>
+                      <a:pPr algn="ctr" latinLnBrk="1">
+                        <a:lnSpc>
+                          <a:spcPct val="150000"/>
+                        </a:lnSpc>
+                      </a:pPr>
+                      <a:r>
+                        <a:rPr lang="ko-KR" altLang="en-US" sz="1200" dirty="0">
+                          <a:solidFill>
+                            <a:schemeClr val="tx1"/>
+                          </a:solidFill>
+                          <a:latin typeface="+mn-lt"/>
+                        </a:rPr>
+                        <a:t>조치 사항</a:t>
+                      </a:r>
+                    </a:p>
+                  </a:txBody>
+                  <a:tcPr anchor="ctr">
+                    <a:lnL w="12700" cap="flat" cmpd="sng" algn="ctr">
+                      <a:solidFill>
+                        <a:schemeClr val="tx1"/>
+                      </a:solidFill>
+                      <a:prstDash val="solid"/>
+                      <a:round/>
+                      <a:headEnd type="none" w="med" len="med"/>
+                      <a:tailEnd type="none" w="med" len="med"/>
+                    </a:lnL>
+                    <a:lnR w="12700" cap="flat" cmpd="sng" algn="ctr">
+                      <a:solidFill>
+                        <a:schemeClr val="tx1"/>
+                      </a:solidFill>
+                      <a:prstDash val="solid"/>
+                      <a:round/>
+                      <a:headEnd type="none" w="med" len="med"/>
+                      <a:tailEnd type="none" w="med" len="med"/>
+                    </a:lnR>
+                    <a:lnT w="12700" cap="flat" cmpd="sng" algn="ctr">
+                      <a:solidFill>
+                        <a:schemeClr val="tx1"/>
+                      </a:solidFill>
+                      <a:prstDash val="solid"/>
+                      <a:round/>
+                      <a:headEnd type="none" w="med" len="med"/>
+                      <a:tailEnd type="none" w="med" len="med"/>
+                    </a:lnT>
+                    <a:lnB w="12700" cap="flat" cmpd="sng" algn="ctr">
+                      <a:solidFill>
+                        <a:schemeClr val="tx1"/>
+                      </a:solidFill>
+                      <a:prstDash val="solid"/>
+                      <a:round/>
+                      <a:headEnd type="none" w="med" len="med"/>
+                      <a:tailEnd type="none" w="med" len="med"/>
+                    </a:lnB>
+                    <a:solidFill>
+                      <a:schemeClr val="bg2">
+                        <a:lumMod val="90000"/>
+                      </a:schemeClr>
+                    </a:solidFill>
+                  </a:tcPr>
+                </a:tc>
+                <a:tc>
+                  <a:txBody>
+                    <a:bodyPr/>
+                    <a:lstStyle/>
+                    <a:p>
+                      <a:pPr algn="ctr" latinLnBrk="1">
+                        <a:lnSpc>
+                          <a:spcPct val="150000"/>
+                        </a:lnSpc>
+                      </a:pPr>
+                      <a:r>
+                        <a:rPr lang="ko-KR" altLang="en-US" sz="1200" dirty="0">
+                          <a:solidFill>
+                            <a:schemeClr val="tx1"/>
+                          </a:solidFill>
+                          <a:latin typeface="+mn-lt"/>
+                        </a:rPr>
+                        <a:t>상태</a:t>
+                      </a:r>
+                    </a:p>
+                  </a:txBody>
+                  <a:tcPr anchor="ctr">
+                    <a:lnL w="12700" cap="flat" cmpd="sng" algn="ctr">
+                      <a:solidFill>
+                        <a:schemeClr val="tx1"/>
+                      </a:solidFill>
+                      <a:prstDash val="solid"/>
+                      <a:round/>
+                      <a:headEnd type="none" w="med" len="med"/>
+                      <a:tailEnd type="none" w="med" len="med"/>
+                    </a:lnL>
+                    <a:lnR w="12700" cap="flat" cmpd="sng" algn="ctr">
+                      <a:solidFill>
+                        <a:schemeClr val="tx1"/>
+                      </a:solidFill>
+                      <a:prstDash val="solid"/>
+                      <a:round/>
+                      <a:headEnd type="none" w="med" len="med"/>
+                      <a:tailEnd type="none" w="med" len="med"/>
+                    </a:lnR>
+                    <a:lnT w="12700" cap="flat" cmpd="sng" algn="ctr">
+                      <a:solidFill>
+                        <a:schemeClr val="tx1"/>
+                      </a:solidFill>
+                      <a:prstDash val="solid"/>
+                      <a:round/>
+                      <a:headEnd type="none" w="med" len="med"/>
+                      <a:tailEnd type="none" w="med" len="med"/>
+                    </a:lnT>
+                    <a:lnB w="12700" cap="flat" cmpd="sng" algn="ctr">
+                      <a:solidFill>
+                        <a:schemeClr val="tx1"/>
+                      </a:solidFill>
+                      <a:prstDash val="solid"/>
+                      <a:round/>
+                      <a:headEnd type="none" w="med" len="med"/>
+                      <a:tailEnd type="none" w="med" len="med"/>
+                    </a:lnB>
+                    <a:solidFill>
+                      <a:schemeClr val="bg2">
+                        <a:lumMod val="90000"/>
+                      </a:schemeClr>
+                    </a:solidFill>
+                  </a:tcPr>
+                </a:tc>
+                <a:extLst>
+                  <a:ext uri="{0D108BD9-81ED-4DB2-BD59-A6C34878D82A}">
+                    <a16:rowId xmlns:a16="http://schemas.microsoft.com/office/drawing/2014/main" val="3778340555"/>
+                  </a:ext>
+                </a:extLst>
+              </a:tr>
+              <a:tr h="370840">
+                <a:tc>
+                  <a:txBody>
+                    <a:bodyPr/>
+                    <a:lstStyle/>
+                    <a:p>
+                      <a:pPr algn="ctr" latinLnBrk="1">
+                        <a:lnSpc>
+                          <a:spcPct val="150000"/>
+                        </a:lnSpc>
+                      </a:pPr>
+                      <a:r>
+                        <a:rPr lang="en-US" altLang="ko-KR" sz="1000" dirty="0">
+                          <a:solidFill>
+                            <a:schemeClr val="tx1"/>
+                          </a:solidFill>
+                          <a:latin typeface="+mn-lt"/>
+                        </a:rPr>
+                        <a:t>1</a:t>
+                      </a:r>
+                      <a:endParaRPr lang="ko-KR" altLang="en-US" sz="1000" dirty="0">
+                        <a:solidFill>
+                          <a:schemeClr val="tx1"/>
+                        </a:solidFill>
+                        <a:latin typeface="+mn-lt"/>
+                      </a:endParaRPr>
+                    </a:p>
+                  </a:txBody>
+                  <a:tcPr anchor="ctr">
+                    <a:lnL w="12700" cap="flat" cmpd="sng" algn="ctr">
+                      <a:solidFill>
+                        <a:schemeClr val="tx1"/>
+                      </a:solidFill>
+                      <a:prstDash val="solid"/>
+                      <a:round/>
+                      <a:headEnd type="none" w="med" len="med"/>
+                      <a:tailEnd type="none" w="med" len="med"/>
+                    </a:lnL>
+                    <a:lnR w="12700" cap="flat" cmpd="sng" algn="ctr">
+                      <a:solidFill>
+                        <a:schemeClr val="tx1"/>
+                      </a:solidFill>
+                      <a:prstDash val="solid"/>
+                      <a:round/>
+                      <a:headEnd type="none" w="med" len="med"/>
+                      <a:tailEnd type="none" w="med" len="med"/>
+                    </a:lnR>
+                    <a:lnT w="12700" cap="flat" cmpd="sng" algn="ctr">
+                      <a:solidFill>
+                        <a:schemeClr val="tx1"/>
+                      </a:solidFill>
+                      <a:prstDash val="solid"/>
+                      <a:round/>
+                      <a:headEnd type="none" w="med" len="med"/>
+                      <a:tailEnd type="none" w="med" len="med"/>
+                    </a:lnT>
+                    <a:lnB w="12700" cap="flat" cmpd="sng" algn="ctr">
+                      <a:solidFill>
+                        <a:schemeClr val="tx1"/>
+                      </a:solidFill>
+                      <a:prstDash val="solid"/>
+                      <a:round/>
+                      <a:headEnd type="none" w="med" len="med"/>
+                      <a:tailEnd type="none" w="med" len="med"/>
+                    </a:lnB>
+                    <a:noFill/>
+                  </a:tcPr>
+                </a:tc>
+                <a:tc>
+                  <a:txBody>
+                    <a:bodyPr/>
+                    <a:lstStyle/>
+                    <a:p>
+                      <a:pPr algn="l" latinLnBrk="1">
+                        <a:lnSpc>
+                          <a:spcPct val="150000"/>
+                        </a:lnSpc>
+                      </a:pPr>
+                      <a:r>
+                        <a:rPr lang="en-US" altLang="ko-KR" sz="1000" dirty="0">
+                          <a:solidFill>
+                            <a:schemeClr val="tx1"/>
+                          </a:solidFill>
+                          <a:latin typeface="+mn-lt"/>
+                        </a:rPr>
+                        <a:t>SIO1P</a:t>
+                      </a:r>
+                      <a:r>
+                        <a:rPr lang="ko-KR" altLang="en-US" sz="1000" dirty="0">
+                          <a:solidFill>
+                            <a:schemeClr val="tx1"/>
+                          </a:solidFill>
+                          <a:latin typeface="+mn-lt"/>
+                        </a:rPr>
+                        <a:t> </a:t>
+                      </a:r>
+                      <a:r>
+                        <a:rPr lang="en-US" altLang="ko-KR" sz="1000" dirty="0">
+                          <a:solidFill>
+                            <a:schemeClr val="tx1"/>
+                          </a:solidFill>
+                          <a:latin typeface="+mn-lt"/>
+                        </a:rPr>
+                        <a:t>Pull-Up </a:t>
+                      </a:r>
+                      <a:r>
+                        <a:rPr lang="ko-KR" altLang="en-US" sz="1000" dirty="0">
+                          <a:solidFill>
+                            <a:schemeClr val="tx1"/>
+                          </a:solidFill>
+                          <a:latin typeface="+mn-lt"/>
+                        </a:rPr>
+                        <a:t>전원이 </a:t>
+                      </a:r>
+                      <a:r>
+                        <a:rPr lang="en-US" altLang="ko-KR" sz="1000" dirty="0">
+                          <a:solidFill>
+                            <a:schemeClr val="tx1"/>
+                          </a:solidFill>
+                          <a:latin typeface="+mn-lt"/>
+                        </a:rPr>
+                        <a:t>ID804 VDD </a:t>
+                      </a:r>
+                      <a:r>
+                        <a:rPr lang="ko-KR" altLang="en-US" sz="1000" dirty="0">
+                          <a:solidFill>
+                            <a:schemeClr val="tx1"/>
+                          </a:solidFill>
+                          <a:latin typeface="+mn-lt"/>
+                        </a:rPr>
+                        <a:t>인가보다 먼저 공급되어</a:t>
+                      </a:r>
+                      <a:r>
+                        <a:rPr lang="en-US" altLang="ko-KR" sz="1000" dirty="0">
+                          <a:solidFill>
+                            <a:schemeClr val="tx1"/>
+                          </a:solidFill>
+                          <a:latin typeface="+mn-lt"/>
+                        </a:rPr>
+                        <a:t>, IC </a:t>
+                      </a:r>
+                      <a:r>
+                        <a:rPr lang="ko-KR" altLang="en-US" sz="1000" dirty="0">
+                          <a:solidFill>
+                            <a:schemeClr val="tx1"/>
+                          </a:solidFill>
+                          <a:latin typeface="+mn-lt"/>
+                        </a:rPr>
+                        <a:t>내부 경로를 통해 </a:t>
+                      </a:r>
+                      <a:r>
+                        <a:rPr lang="en-US" altLang="ko-KR" sz="1000" dirty="0">
+                          <a:solidFill>
+                            <a:schemeClr val="tx1"/>
+                          </a:solidFill>
+                          <a:latin typeface="+mn-lt"/>
+                        </a:rPr>
+                        <a:t>VDD</a:t>
+                      </a:r>
+                      <a:r>
+                        <a:rPr lang="ko-KR" altLang="en-US" sz="1000" dirty="0">
+                          <a:solidFill>
+                            <a:schemeClr val="tx1"/>
+                          </a:solidFill>
+                          <a:latin typeface="+mn-lt"/>
+                        </a:rPr>
+                        <a:t>가 비정상적으로 상승함</a:t>
+                      </a:r>
+                      <a:r>
+                        <a:rPr lang="en-US" altLang="ko-KR" sz="1000" dirty="0">
+                          <a:solidFill>
+                            <a:schemeClr val="tx1"/>
+                          </a:solidFill>
+                          <a:latin typeface="+mn-lt"/>
+                        </a:rPr>
+                        <a:t>.</a:t>
+                      </a:r>
+                      <a:endParaRPr lang="ko-KR" altLang="en-US" sz="1000" dirty="0">
+                        <a:solidFill>
+                          <a:schemeClr val="tx1"/>
+                        </a:solidFill>
+                        <a:latin typeface="+mn-lt"/>
+                      </a:endParaRPr>
+                    </a:p>
+                  </a:txBody>
+                  <a:tcPr anchor="ctr">
+                    <a:lnL w="12700" cap="flat" cmpd="sng" algn="ctr">
+                      <a:solidFill>
+                        <a:schemeClr val="tx1"/>
+                      </a:solidFill>
+                      <a:prstDash val="solid"/>
+                      <a:round/>
+                      <a:headEnd type="none" w="med" len="med"/>
+                      <a:tailEnd type="none" w="med" len="med"/>
+                    </a:lnL>
+                    <a:lnR w="12700" cap="flat" cmpd="sng" algn="ctr">
+                      <a:solidFill>
+                        <a:schemeClr val="tx1"/>
+                      </a:solidFill>
+                      <a:prstDash val="solid"/>
+                      <a:round/>
+                      <a:headEnd type="none" w="med" len="med"/>
+                      <a:tailEnd type="none" w="med" len="med"/>
+                    </a:lnR>
+                    <a:lnT w="12700" cap="flat" cmpd="sng" algn="ctr">
+                      <a:solidFill>
+                        <a:schemeClr val="tx1"/>
+                      </a:solidFill>
+                      <a:prstDash val="solid"/>
+                      <a:round/>
+                      <a:headEnd type="none" w="med" len="med"/>
+                      <a:tailEnd type="none" w="med" len="med"/>
+                    </a:lnT>
+                    <a:lnB w="12700" cap="flat" cmpd="sng" algn="ctr">
+                      <a:solidFill>
+                        <a:schemeClr val="tx1"/>
+                      </a:solidFill>
+                      <a:prstDash val="solid"/>
+                      <a:round/>
+                      <a:headEnd type="none" w="med" len="med"/>
+                      <a:tailEnd type="none" w="med" len="med"/>
+                    </a:lnB>
+                    <a:noFill/>
+                  </a:tcPr>
+                </a:tc>
+                <a:tc>
+                  <a:txBody>
+                    <a:bodyPr/>
+                    <a:lstStyle/>
+                    <a:p>
+                      <a:pPr algn="l" latinLnBrk="1">
+                        <a:lnSpc>
+                          <a:spcPct val="150000"/>
+                        </a:lnSpc>
+                      </a:pPr>
+                      <a:r>
+                        <a:rPr lang="en-US" altLang="ko-KR" sz="1000" dirty="0">
+                          <a:solidFill>
+                            <a:schemeClr val="tx1"/>
+                          </a:solidFill>
+                          <a:latin typeface="+mn-lt"/>
+                        </a:rPr>
+                        <a:t>SIO1P Pull-Up </a:t>
+                      </a:r>
+                      <a:r>
+                        <a:rPr lang="ko-KR" altLang="en-US" sz="1000" dirty="0">
+                          <a:solidFill>
+                            <a:schemeClr val="tx1"/>
+                          </a:solidFill>
+                          <a:latin typeface="+mn-lt"/>
+                        </a:rPr>
+                        <a:t>전원을 </a:t>
+                      </a:r>
+                      <a:r>
+                        <a:rPr lang="en-US" altLang="ko-KR" sz="1000" dirty="0">
+                          <a:solidFill>
+                            <a:schemeClr val="tx1"/>
+                          </a:solidFill>
+                          <a:latin typeface="+mn-lt"/>
+                        </a:rPr>
+                        <a:t>ID804_VDD</a:t>
+                      </a:r>
+                      <a:r>
+                        <a:rPr lang="ko-KR" altLang="en-US" sz="1000" dirty="0">
+                          <a:solidFill>
+                            <a:schemeClr val="tx1"/>
+                          </a:solidFill>
+                          <a:latin typeface="+mn-lt"/>
+                        </a:rPr>
+                        <a:t>로 변경</a:t>
+                      </a:r>
+                    </a:p>
+                  </a:txBody>
+                  <a:tcPr anchor="ctr">
+                    <a:lnL w="12700" cap="flat" cmpd="sng" algn="ctr">
+                      <a:solidFill>
+                        <a:schemeClr val="tx1"/>
+                      </a:solidFill>
+                      <a:prstDash val="solid"/>
+                      <a:round/>
+                      <a:headEnd type="none" w="med" len="med"/>
+                      <a:tailEnd type="none" w="med" len="med"/>
+                    </a:lnL>
+                    <a:lnR w="12700" cap="flat" cmpd="sng" algn="ctr">
+                      <a:solidFill>
+                        <a:schemeClr val="tx1"/>
+                      </a:solidFill>
+                      <a:prstDash val="solid"/>
+                      <a:round/>
+                      <a:headEnd type="none" w="med" len="med"/>
+                      <a:tailEnd type="none" w="med" len="med"/>
+                    </a:lnR>
+                    <a:lnT w="12700" cap="flat" cmpd="sng" algn="ctr">
+                      <a:solidFill>
+                        <a:schemeClr val="tx1"/>
+                      </a:solidFill>
+                      <a:prstDash val="solid"/>
+                      <a:round/>
+                      <a:headEnd type="none" w="med" len="med"/>
+                      <a:tailEnd type="none" w="med" len="med"/>
+                    </a:lnT>
+                    <a:lnB w="12700" cap="flat" cmpd="sng" algn="ctr">
+                      <a:solidFill>
+                        <a:schemeClr val="tx1"/>
+                      </a:solidFill>
+                      <a:prstDash val="solid"/>
+                      <a:round/>
+                      <a:headEnd type="none" w="med" len="med"/>
+                      <a:tailEnd type="none" w="med" len="med"/>
+                    </a:lnB>
+                    <a:noFill/>
+                  </a:tcPr>
+                </a:tc>
+                <a:tc>
+                  <a:txBody>
+                    <a:bodyPr/>
+                    <a:lstStyle/>
+                    <a:p>
+                      <a:pPr algn="ctr" latinLnBrk="1">
+                        <a:lnSpc>
+                          <a:spcPct val="150000"/>
+                        </a:lnSpc>
+                      </a:pPr>
+                      <a:r>
+                        <a:rPr lang="ko-KR" altLang="en-US" sz="1000" dirty="0">
+                          <a:solidFill>
+                            <a:schemeClr val="tx1"/>
+                          </a:solidFill>
+                          <a:latin typeface="+mn-lt"/>
+                        </a:rPr>
+                        <a:t>완료</a:t>
+                      </a:r>
+                    </a:p>
+                  </a:txBody>
+                  <a:tcPr anchor="ctr">
+                    <a:lnL w="12700" cap="flat" cmpd="sng" algn="ctr">
+                      <a:solidFill>
+                        <a:schemeClr val="tx1"/>
+                      </a:solidFill>
+                      <a:prstDash val="solid"/>
+                      <a:round/>
+                      <a:headEnd type="none" w="med" len="med"/>
+                      <a:tailEnd type="none" w="med" len="med"/>
+                    </a:lnL>
+                    <a:lnR w="12700" cap="flat" cmpd="sng" algn="ctr">
+                      <a:solidFill>
+                        <a:schemeClr val="tx1"/>
+                      </a:solidFill>
+                      <a:prstDash val="solid"/>
+                      <a:round/>
+                      <a:headEnd type="none" w="med" len="med"/>
+                      <a:tailEnd type="none" w="med" len="med"/>
+                    </a:lnR>
+                    <a:lnT w="12700" cap="flat" cmpd="sng" algn="ctr">
+                      <a:solidFill>
+                        <a:schemeClr val="tx1"/>
+                      </a:solidFill>
+                      <a:prstDash val="solid"/>
+                      <a:round/>
+                      <a:headEnd type="none" w="med" len="med"/>
+                      <a:tailEnd type="none" w="med" len="med"/>
+                    </a:lnT>
+                    <a:lnB w="12700" cap="flat" cmpd="sng" algn="ctr">
+                      <a:solidFill>
+                        <a:schemeClr val="tx1"/>
+                      </a:solidFill>
+                      <a:prstDash val="solid"/>
+                      <a:round/>
+                      <a:headEnd type="none" w="med" len="med"/>
+                      <a:tailEnd type="none" w="med" len="med"/>
+                    </a:lnB>
+                    <a:noFill/>
+                  </a:tcPr>
+                </a:tc>
+                <a:extLst>
+                  <a:ext uri="{0D108BD9-81ED-4DB2-BD59-A6C34878D82A}">
+                    <a16:rowId xmlns:a16="http://schemas.microsoft.com/office/drawing/2014/main" val="2093277037"/>
+                  </a:ext>
+                </a:extLst>
+              </a:tr>
+              <a:tr h="370840">
+                <a:tc>
+                  <a:txBody>
+                    <a:bodyPr/>
+                    <a:lstStyle/>
+                    <a:p>
+                      <a:pPr algn="ctr" latinLnBrk="1">
+                        <a:lnSpc>
+                          <a:spcPct val="150000"/>
+                        </a:lnSpc>
+                      </a:pPr>
+                      <a:r>
+                        <a:rPr lang="en-US" altLang="ko-KR" sz="1000" dirty="0">
+                          <a:solidFill>
+                            <a:schemeClr val="tx1"/>
+                          </a:solidFill>
+                          <a:latin typeface="+mn-lt"/>
+                        </a:rPr>
+                        <a:t>2</a:t>
+                      </a:r>
+                      <a:endParaRPr lang="ko-KR" altLang="en-US" sz="1000" dirty="0">
+                        <a:solidFill>
+                          <a:schemeClr val="tx1"/>
+                        </a:solidFill>
+                        <a:latin typeface="+mn-lt"/>
+                      </a:endParaRPr>
+                    </a:p>
+                  </a:txBody>
+                  <a:tcPr anchor="ctr">
+                    <a:lnL w="12700" cap="flat" cmpd="sng" algn="ctr">
+                      <a:solidFill>
+                        <a:schemeClr val="tx1"/>
+                      </a:solidFill>
+                      <a:prstDash val="solid"/>
+                      <a:round/>
+                      <a:headEnd type="none" w="med" len="med"/>
+                      <a:tailEnd type="none" w="med" len="med"/>
+                    </a:lnL>
+                    <a:lnR w="12700" cap="flat" cmpd="sng" algn="ctr">
+                      <a:solidFill>
+                        <a:schemeClr val="tx1"/>
+                      </a:solidFill>
+                      <a:prstDash val="solid"/>
+                      <a:round/>
+                      <a:headEnd type="none" w="med" len="med"/>
+                      <a:tailEnd type="none" w="med" len="med"/>
+                    </a:lnR>
+                    <a:lnT w="12700" cap="flat" cmpd="sng" algn="ctr">
+                      <a:solidFill>
+                        <a:schemeClr val="tx1"/>
+                      </a:solidFill>
+                      <a:prstDash val="solid"/>
+                      <a:round/>
+                      <a:headEnd type="none" w="med" len="med"/>
+                      <a:tailEnd type="none" w="med" len="med"/>
+                    </a:lnT>
+                    <a:lnB w="12700" cap="flat" cmpd="sng" algn="ctr">
+                      <a:solidFill>
+                        <a:schemeClr val="tx1"/>
+                      </a:solidFill>
+                      <a:prstDash val="solid"/>
+                      <a:round/>
+                      <a:headEnd type="none" w="med" len="med"/>
+                      <a:tailEnd type="none" w="med" len="med"/>
+                    </a:lnB>
+                    <a:noFill/>
+                  </a:tcPr>
+                </a:tc>
+                <a:tc>
+                  <a:txBody>
+                    <a:bodyPr/>
+                    <a:lstStyle/>
+                    <a:p>
+                      <a:pPr algn="l" latinLnBrk="1">
+                        <a:lnSpc>
+                          <a:spcPct val="150000"/>
+                        </a:lnSpc>
+                      </a:pPr>
+                      <a:r>
+                        <a:rPr lang="en-US" altLang="ko-KR" sz="1000" dirty="0">
+                          <a:solidFill>
+                            <a:schemeClr val="tx1"/>
+                          </a:solidFill>
+                          <a:latin typeface="+mn-lt"/>
+                        </a:rPr>
+                        <a:t>ID804_VDD</a:t>
+                      </a:r>
+                      <a:r>
+                        <a:rPr lang="ko-KR" altLang="en-US" sz="1000" dirty="0">
+                          <a:solidFill>
+                            <a:schemeClr val="tx1"/>
+                          </a:solidFill>
+                          <a:latin typeface="+mn-lt"/>
+                        </a:rPr>
+                        <a:t> 리플 및 </a:t>
+                      </a:r>
+                      <a:r>
+                        <a:rPr lang="en-US" altLang="ko-KR" sz="1000" dirty="0">
+                          <a:solidFill>
+                            <a:schemeClr val="tx1"/>
+                          </a:solidFill>
+                          <a:latin typeface="+mn-lt"/>
+                        </a:rPr>
+                        <a:t>rise time</a:t>
+                      </a:r>
+                      <a:r>
+                        <a:rPr lang="ko-KR" altLang="en-US" sz="1000" dirty="0">
+                          <a:solidFill>
+                            <a:schemeClr val="tx1"/>
+                          </a:solidFill>
+                          <a:latin typeface="+mn-lt"/>
+                        </a:rPr>
+                        <a:t>이 과도하여 동작 안정성 저하 우려가 있음</a:t>
+                      </a:r>
+                      <a:r>
+                        <a:rPr lang="en-US" altLang="ko-KR" sz="1000" dirty="0">
+                          <a:solidFill>
+                            <a:schemeClr val="tx1"/>
+                          </a:solidFill>
+                          <a:latin typeface="+mn-lt"/>
+                        </a:rPr>
+                        <a:t>.</a:t>
+                      </a:r>
+                    </a:p>
+                  </a:txBody>
+                  <a:tcPr anchor="ctr">
+                    <a:lnL w="12700" cap="flat" cmpd="sng" algn="ctr">
+                      <a:solidFill>
+                        <a:schemeClr val="tx1"/>
+                      </a:solidFill>
+                      <a:prstDash val="solid"/>
+                      <a:round/>
+                      <a:headEnd type="none" w="med" len="med"/>
+                      <a:tailEnd type="none" w="med" len="med"/>
+                    </a:lnL>
+                    <a:lnR w="12700" cap="flat" cmpd="sng" algn="ctr">
+                      <a:solidFill>
+                        <a:schemeClr val="tx1"/>
+                      </a:solidFill>
+                      <a:prstDash val="solid"/>
+                      <a:round/>
+                      <a:headEnd type="none" w="med" len="med"/>
+                      <a:tailEnd type="none" w="med" len="med"/>
+                    </a:lnR>
+                    <a:lnT w="12700" cap="flat" cmpd="sng" algn="ctr">
+                      <a:solidFill>
+                        <a:schemeClr val="tx1"/>
+                      </a:solidFill>
+                      <a:prstDash val="solid"/>
+                      <a:round/>
+                      <a:headEnd type="none" w="med" len="med"/>
+                      <a:tailEnd type="none" w="med" len="med"/>
+                    </a:lnT>
+                    <a:lnB w="12700" cap="flat" cmpd="sng" algn="ctr">
+                      <a:solidFill>
+                        <a:schemeClr val="tx1"/>
+                      </a:solidFill>
+                      <a:prstDash val="solid"/>
+                      <a:round/>
+                      <a:headEnd type="none" w="med" len="med"/>
+                      <a:tailEnd type="none" w="med" len="med"/>
+                    </a:lnB>
+                    <a:noFill/>
+                  </a:tcPr>
+                </a:tc>
+                <a:tc>
+                  <a:txBody>
+                    <a:bodyPr/>
+                    <a:lstStyle/>
+                    <a:p>
+                      <a:pPr algn="l" latinLnBrk="1">
+                        <a:lnSpc>
+                          <a:spcPct val="150000"/>
+                        </a:lnSpc>
+                      </a:pPr>
+                      <a:r>
+                        <a:rPr lang="en-US" altLang="ko-KR" sz="1000" dirty="0">
+                          <a:solidFill>
+                            <a:schemeClr val="tx1"/>
+                          </a:solidFill>
+                          <a:latin typeface="+mn-lt"/>
+                        </a:rPr>
+                        <a:t>ID804_VDD </a:t>
+                      </a:r>
+                      <a:r>
+                        <a:rPr lang="ko-KR" altLang="en-US" sz="1000" dirty="0">
+                          <a:solidFill>
+                            <a:schemeClr val="tx1"/>
+                          </a:solidFill>
+                          <a:latin typeface="+mn-lt"/>
+                        </a:rPr>
+                        <a:t>주변 </a:t>
+                      </a:r>
+                      <a:r>
+                        <a:rPr lang="ko-KR" altLang="en-US" sz="1000" dirty="0" err="1">
+                          <a:solidFill>
+                            <a:schemeClr val="tx1"/>
+                          </a:solidFill>
+                          <a:latin typeface="+mn-lt"/>
+                        </a:rPr>
+                        <a:t>커패시터</a:t>
+                      </a:r>
+                      <a:r>
+                        <a:rPr lang="ko-KR" altLang="en-US" sz="1000" dirty="0">
+                          <a:solidFill>
+                            <a:schemeClr val="tx1"/>
+                          </a:solidFill>
+                          <a:latin typeface="+mn-lt"/>
+                        </a:rPr>
+                        <a:t> 용량 및 구성 변경</a:t>
+                      </a:r>
+                      <a:endParaRPr lang="en-US" altLang="ko-KR" sz="1000" dirty="0">
+                        <a:solidFill>
+                          <a:schemeClr val="tx1"/>
+                        </a:solidFill>
+                        <a:latin typeface="+mn-lt"/>
+                      </a:endParaRPr>
+                    </a:p>
+                  </a:txBody>
+                  <a:tcPr anchor="ctr">
+                    <a:lnL w="12700" cap="flat" cmpd="sng" algn="ctr">
+                      <a:solidFill>
+                        <a:schemeClr val="tx1"/>
+                      </a:solidFill>
+                      <a:prstDash val="solid"/>
+                      <a:round/>
+                      <a:headEnd type="none" w="med" len="med"/>
+                      <a:tailEnd type="none" w="med" len="med"/>
+                    </a:lnL>
+                    <a:lnR w="12700" cap="flat" cmpd="sng" algn="ctr">
+                      <a:solidFill>
+                        <a:schemeClr val="tx1"/>
+                      </a:solidFill>
+                      <a:prstDash val="solid"/>
+                      <a:round/>
+                      <a:headEnd type="none" w="med" len="med"/>
+                      <a:tailEnd type="none" w="med" len="med"/>
+                    </a:lnR>
+                    <a:lnT w="12700" cap="flat" cmpd="sng" algn="ctr">
+                      <a:solidFill>
+                        <a:schemeClr val="tx1"/>
+                      </a:solidFill>
+                      <a:prstDash val="solid"/>
+                      <a:round/>
+                      <a:headEnd type="none" w="med" len="med"/>
+                      <a:tailEnd type="none" w="med" len="med"/>
+                    </a:lnT>
+                    <a:lnB w="12700" cap="flat" cmpd="sng" algn="ctr">
+                      <a:solidFill>
+                        <a:schemeClr val="tx1"/>
+                      </a:solidFill>
+                      <a:prstDash val="solid"/>
+                      <a:round/>
+                      <a:headEnd type="none" w="med" len="med"/>
+                      <a:tailEnd type="none" w="med" len="med"/>
+                    </a:lnB>
+                    <a:noFill/>
+                  </a:tcPr>
+                </a:tc>
+                <a:tc>
+                  <a:txBody>
+                    <a:bodyPr/>
+                    <a:lstStyle/>
+                    <a:p>
+                      <a:pPr algn="ctr" latinLnBrk="1">
+                        <a:lnSpc>
+                          <a:spcPct val="150000"/>
+                        </a:lnSpc>
+                      </a:pPr>
+                      <a:r>
+                        <a:rPr lang="ko-KR" altLang="en-US" sz="1000" dirty="0">
+                          <a:solidFill>
+                            <a:schemeClr val="tx1"/>
+                          </a:solidFill>
+                          <a:latin typeface="+mn-lt"/>
+                        </a:rPr>
+                        <a:t>완료</a:t>
+                      </a:r>
+                      <a:endParaRPr lang="en-US" altLang="ko-KR" sz="1000" dirty="0">
+                        <a:solidFill>
+                          <a:schemeClr val="tx1"/>
+                        </a:solidFill>
+                        <a:latin typeface="+mn-lt"/>
+                      </a:endParaRPr>
+                    </a:p>
+                  </a:txBody>
+                  <a:tcPr anchor="ctr">
+                    <a:lnL w="12700" cap="flat" cmpd="sng" algn="ctr">
+                      <a:solidFill>
+                        <a:schemeClr val="tx1"/>
+                      </a:solidFill>
+                      <a:prstDash val="solid"/>
+                      <a:round/>
+                      <a:headEnd type="none" w="med" len="med"/>
+                      <a:tailEnd type="none" w="med" len="med"/>
+                    </a:lnL>
+                    <a:lnR w="12700" cap="flat" cmpd="sng" algn="ctr">
+                      <a:solidFill>
+                        <a:schemeClr val="tx1"/>
+                      </a:solidFill>
+                      <a:prstDash val="solid"/>
+                      <a:round/>
+                      <a:headEnd type="none" w="med" len="med"/>
+                      <a:tailEnd type="none" w="med" len="med"/>
+                    </a:lnR>
+                    <a:lnT w="12700" cap="flat" cmpd="sng" algn="ctr">
+                      <a:solidFill>
+                        <a:schemeClr val="tx1"/>
+                      </a:solidFill>
+                      <a:prstDash val="solid"/>
+                      <a:round/>
+                      <a:headEnd type="none" w="med" len="med"/>
+                      <a:tailEnd type="none" w="med" len="med"/>
+                    </a:lnT>
+                    <a:lnB w="12700" cap="flat" cmpd="sng" algn="ctr">
+                      <a:solidFill>
+                        <a:schemeClr val="tx1"/>
+                      </a:solidFill>
+                      <a:prstDash val="solid"/>
+                      <a:round/>
+                      <a:headEnd type="none" w="med" len="med"/>
+                      <a:tailEnd type="none" w="med" len="med"/>
+                    </a:lnB>
+                    <a:noFill/>
+                  </a:tcPr>
+                </a:tc>
+                <a:extLst>
+                  <a:ext uri="{0D108BD9-81ED-4DB2-BD59-A6C34878D82A}">
+                    <a16:rowId xmlns:a16="http://schemas.microsoft.com/office/drawing/2014/main" val="3573278869"/>
+                  </a:ext>
+                </a:extLst>
+              </a:tr>
+              <a:tr h="370840">
+                <a:tc>
+                  <a:txBody>
+                    <a:bodyPr/>
+                    <a:lstStyle/>
+                    <a:p>
+                      <a:pPr algn="ctr" latinLnBrk="1">
+                        <a:lnSpc>
+                          <a:spcPct val="150000"/>
+                        </a:lnSpc>
+                      </a:pPr>
+                      <a:r>
+                        <a:rPr lang="en-US" altLang="ko-KR" sz="1000" dirty="0">
+                          <a:solidFill>
+                            <a:schemeClr val="tx1"/>
+                          </a:solidFill>
+                          <a:latin typeface="+mn-lt"/>
+                        </a:rPr>
+                        <a:t>3</a:t>
+                      </a:r>
+                      <a:endParaRPr lang="ko-KR" altLang="en-US" sz="1000" dirty="0">
+                        <a:solidFill>
+                          <a:schemeClr val="tx1"/>
+                        </a:solidFill>
+                        <a:latin typeface="+mn-lt"/>
+                      </a:endParaRPr>
+                    </a:p>
+                  </a:txBody>
+                  <a:tcPr anchor="ctr">
+                    <a:lnL w="12700" cap="flat" cmpd="sng" algn="ctr">
+                      <a:solidFill>
+                        <a:schemeClr val="tx1"/>
+                      </a:solidFill>
+                      <a:prstDash val="solid"/>
+                      <a:round/>
+                      <a:headEnd type="none" w="med" len="med"/>
+                      <a:tailEnd type="none" w="med" len="med"/>
+                    </a:lnL>
+                    <a:lnR w="12700" cap="flat" cmpd="sng" algn="ctr">
+                      <a:solidFill>
+                        <a:schemeClr val="tx1"/>
+                      </a:solidFill>
+                      <a:prstDash val="solid"/>
+                      <a:round/>
+                      <a:headEnd type="none" w="med" len="med"/>
+                      <a:tailEnd type="none" w="med" len="med"/>
+                    </a:lnR>
+                    <a:lnT w="12700" cap="flat" cmpd="sng" algn="ctr">
+                      <a:solidFill>
+                        <a:schemeClr val="tx1"/>
+                      </a:solidFill>
+                      <a:prstDash val="solid"/>
+                      <a:round/>
+                      <a:headEnd type="none" w="med" len="med"/>
+                      <a:tailEnd type="none" w="med" len="med"/>
+                    </a:lnT>
+                    <a:lnB w="12700" cap="flat" cmpd="sng" algn="ctr">
+                      <a:solidFill>
+                        <a:schemeClr val="tx1"/>
+                      </a:solidFill>
+                      <a:prstDash val="solid"/>
+                      <a:round/>
+                      <a:headEnd type="none" w="med" len="med"/>
+                      <a:tailEnd type="none" w="med" len="med"/>
+                    </a:lnB>
+                    <a:noFill/>
+                  </a:tcPr>
+                </a:tc>
+                <a:tc>
+                  <a:txBody>
+                    <a:bodyPr/>
+                    <a:lstStyle/>
+                    <a:p>
+                      <a:pPr algn="l" latinLnBrk="1">
+                        <a:lnSpc>
+                          <a:spcPct val="150000"/>
+                        </a:lnSpc>
+                      </a:pPr>
+                      <a:r>
+                        <a:rPr lang="ko-KR" altLang="en-US" sz="1000" dirty="0">
+                          <a:solidFill>
+                            <a:schemeClr val="tx1"/>
+                          </a:solidFill>
+                          <a:latin typeface="+mn-lt"/>
+                        </a:rPr>
+                        <a:t>회로도에서 </a:t>
+                      </a:r>
+                      <a:r>
+                        <a:rPr lang="en-US" altLang="ko-KR" sz="1000" dirty="0">
+                          <a:solidFill>
+                            <a:schemeClr val="tx1"/>
+                          </a:solidFill>
+                          <a:latin typeface="+mn-lt"/>
+                        </a:rPr>
+                        <a:t>“ID804</a:t>
+                      </a:r>
+                      <a:r>
+                        <a:rPr lang="en-US" altLang="ko-KR" sz="1000" dirty="0">
+                          <a:solidFill>
+                            <a:srgbClr val="FF0000"/>
+                          </a:solidFill>
+                          <a:latin typeface="+mn-lt"/>
+                        </a:rPr>
+                        <a:t>_</a:t>
+                      </a:r>
+                      <a:r>
+                        <a:rPr lang="en-US" altLang="ko-KR" sz="1000" dirty="0">
+                          <a:solidFill>
+                            <a:schemeClr val="tx1"/>
+                          </a:solidFill>
+                          <a:latin typeface="+mn-lt"/>
+                        </a:rPr>
+                        <a:t>RXD”</a:t>
+                      </a:r>
+                      <a:r>
+                        <a:rPr lang="ko-KR" altLang="en-US" sz="1000" dirty="0">
+                          <a:solidFill>
+                            <a:schemeClr val="tx1"/>
+                          </a:solidFill>
+                          <a:latin typeface="+mn-lt"/>
+                        </a:rPr>
+                        <a:t>와 </a:t>
+                      </a:r>
+                      <a:r>
+                        <a:rPr lang="en-US" altLang="ko-KR" sz="1000" dirty="0">
+                          <a:solidFill>
+                            <a:schemeClr val="tx1"/>
+                          </a:solidFill>
+                          <a:latin typeface="+mn-lt"/>
+                        </a:rPr>
+                        <a:t>“ID804</a:t>
+                      </a:r>
+                      <a:r>
+                        <a:rPr lang="en-US" altLang="ko-KR" sz="1000" dirty="0">
+                          <a:solidFill>
+                            <a:srgbClr val="FF0000"/>
+                          </a:solidFill>
+                          <a:latin typeface="+mn-lt"/>
+                        </a:rPr>
+                        <a:t>-</a:t>
+                      </a:r>
+                      <a:r>
+                        <a:rPr lang="en-US" altLang="ko-KR" sz="1000" dirty="0">
+                          <a:solidFill>
+                            <a:schemeClr val="tx1"/>
+                          </a:solidFill>
+                          <a:latin typeface="+mn-lt"/>
+                        </a:rPr>
+                        <a:t>RXD” Net Label</a:t>
+                      </a:r>
+                      <a:r>
+                        <a:rPr lang="ko-KR" altLang="en-US" sz="1000" dirty="0">
+                          <a:solidFill>
+                            <a:schemeClr val="tx1"/>
+                          </a:solidFill>
+                          <a:latin typeface="+mn-lt"/>
+                        </a:rPr>
+                        <a:t>이 불일치하여 신호가 연결되지 않음</a:t>
+                      </a:r>
+                      <a:r>
+                        <a:rPr lang="en-US" altLang="ko-KR" sz="1000" dirty="0">
+                          <a:solidFill>
+                            <a:schemeClr val="tx1"/>
+                          </a:solidFill>
+                          <a:latin typeface="+mn-lt"/>
+                        </a:rPr>
+                        <a:t>.</a:t>
+                      </a:r>
+                      <a:endParaRPr lang="ko-KR" altLang="en-US" sz="1000" dirty="0">
+                        <a:solidFill>
+                          <a:schemeClr val="tx1"/>
+                        </a:solidFill>
+                        <a:latin typeface="+mn-lt"/>
+                      </a:endParaRPr>
+                    </a:p>
+                  </a:txBody>
+                  <a:tcPr anchor="ctr">
+                    <a:lnL w="12700" cap="flat" cmpd="sng" algn="ctr">
+                      <a:solidFill>
+                        <a:schemeClr val="tx1"/>
+                      </a:solidFill>
+                      <a:prstDash val="solid"/>
+                      <a:round/>
+                      <a:headEnd type="none" w="med" len="med"/>
+                      <a:tailEnd type="none" w="med" len="med"/>
+                    </a:lnL>
+                    <a:lnR w="12700" cap="flat" cmpd="sng" algn="ctr">
+                      <a:solidFill>
+                        <a:schemeClr val="tx1"/>
+                      </a:solidFill>
+                      <a:prstDash val="solid"/>
+                      <a:round/>
+                      <a:headEnd type="none" w="med" len="med"/>
+                      <a:tailEnd type="none" w="med" len="med"/>
+                    </a:lnR>
+                    <a:lnT w="12700" cap="flat" cmpd="sng" algn="ctr">
+                      <a:solidFill>
+                        <a:schemeClr val="tx1"/>
+                      </a:solidFill>
+                      <a:prstDash val="solid"/>
+                      <a:round/>
+                      <a:headEnd type="none" w="med" len="med"/>
+                      <a:tailEnd type="none" w="med" len="med"/>
+                    </a:lnT>
+                    <a:lnB w="12700" cap="flat" cmpd="sng" algn="ctr">
+                      <a:solidFill>
+                        <a:schemeClr val="tx1"/>
+                      </a:solidFill>
+                      <a:prstDash val="solid"/>
+                      <a:round/>
+                      <a:headEnd type="none" w="med" len="med"/>
+                      <a:tailEnd type="none" w="med" len="med"/>
+                    </a:lnB>
+                    <a:noFill/>
+                  </a:tcPr>
+                </a:tc>
+                <a:tc>
+                  <a:txBody>
+                    <a:bodyPr/>
+                    <a:lstStyle/>
+                    <a:p>
+                      <a:pPr algn="l" latinLnBrk="1">
+                        <a:lnSpc>
+                          <a:spcPct val="150000"/>
+                        </a:lnSpc>
+                      </a:pPr>
+                      <a:r>
+                        <a:rPr lang="en-US" altLang="ko-KR" sz="1000" dirty="0">
+                          <a:solidFill>
+                            <a:schemeClr val="tx1"/>
+                          </a:solidFill>
+                          <a:latin typeface="+mn-lt"/>
+                        </a:rPr>
+                        <a:t>Net</a:t>
+                      </a:r>
+                      <a:r>
+                        <a:rPr lang="ko-KR" altLang="en-US" sz="1000" dirty="0">
+                          <a:solidFill>
+                            <a:schemeClr val="tx1"/>
+                          </a:solidFill>
+                          <a:latin typeface="+mn-lt"/>
+                        </a:rPr>
+                        <a:t> 점퍼 연결</a:t>
+                      </a:r>
+                    </a:p>
+                  </a:txBody>
+                  <a:tcPr anchor="ctr">
+                    <a:lnL w="12700" cap="flat" cmpd="sng" algn="ctr">
+                      <a:solidFill>
+                        <a:schemeClr val="tx1"/>
+                      </a:solidFill>
+                      <a:prstDash val="solid"/>
+                      <a:round/>
+                      <a:headEnd type="none" w="med" len="med"/>
+                      <a:tailEnd type="none" w="med" len="med"/>
+                    </a:lnL>
+                    <a:lnR w="12700" cap="flat" cmpd="sng" algn="ctr">
+                      <a:solidFill>
+                        <a:schemeClr val="tx1"/>
+                      </a:solidFill>
+                      <a:prstDash val="solid"/>
+                      <a:round/>
+                      <a:headEnd type="none" w="med" len="med"/>
+                      <a:tailEnd type="none" w="med" len="med"/>
+                    </a:lnR>
+                    <a:lnT w="12700" cap="flat" cmpd="sng" algn="ctr">
+                      <a:solidFill>
+                        <a:schemeClr val="tx1"/>
+                      </a:solidFill>
+                      <a:prstDash val="solid"/>
+                      <a:round/>
+                      <a:headEnd type="none" w="med" len="med"/>
+                      <a:tailEnd type="none" w="med" len="med"/>
+                    </a:lnT>
+                    <a:lnB w="12700" cap="flat" cmpd="sng" algn="ctr">
+                      <a:solidFill>
+                        <a:schemeClr val="tx1"/>
+                      </a:solidFill>
+                      <a:prstDash val="solid"/>
+                      <a:round/>
+                      <a:headEnd type="none" w="med" len="med"/>
+                      <a:tailEnd type="none" w="med" len="med"/>
+                    </a:lnB>
+                    <a:noFill/>
+                  </a:tcPr>
+                </a:tc>
+                <a:tc>
+                  <a:txBody>
+                    <a:bodyPr/>
+                    <a:lstStyle/>
+                    <a:p>
+                      <a:pPr algn="ctr" latinLnBrk="1">
+                        <a:lnSpc>
+                          <a:spcPct val="150000"/>
+                        </a:lnSpc>
+                      </a:pPr>
+                      <a:r>
+                        <a:rPr lang="ko-KR" altLang="en-US" sz="1000" dirty="0">
+                          <a:solidFill>
+                            <a:schemeClr val="tx1"/>
+                          </a:solidFill>
+                          <a:latin typeface="+mn-lt"/>
+                        </a:rPr>
+                        <a:t>완료</a:t>
+                      </a:r>
+                    </a:p>
+                  </a:txBody>
+                  <a:tcPr anchor="ctr">
+                    <a:lnL w="12700" cap="flat" cmpd="sng" algn="ctr">
+                      <a:solidFill>
+                        <a:schemeClr val="tx1"/>
+                      </a:solidFill>
+                      <a:prstDash val="solid"/>
+                      <a:round/>
+                      <a:headEnd type="none" w="med" len="med"/>
+                      <a:tailEnd type="none" w="med" len="med"/>
+                    </a:lnL>
+                    <a:lnR w="12700" cap="flat" cmpd="sng" algn="ctr">
+                      <a:solidFill>
+                        <a:schemeClr val="tx1"/>
+                      </a:solidFill>
+                      <a:prstDash val="solid"/>
+                      <a:round/>
+                      <a:headEnd type="none" w="med" len="med"/>
+                      <a:tailEnd type="none" w="med" len="med"/>
+                    </a:lnR>
+                    <a:lnT w="12700" cap="flat" cmpd="sng" algn="ctr">
+                      <a:solidFill>
+                        <a:schemeClr val="tx1"/>
+                      </a:solidFill>
+                      <a:prstDash val="solid"/>
+                      <a:round/>
+                      <a:headEnd type="none" w="med" len="med"/>
+                      <a:tailEnd type="none" w="med" len="med"/>
+                    </a:lnT>
+                    <a:lnB w="12700" cap="flat" cmpd="sng" algn="ctr">
+                      <a:solidFill>
+                        <a:schemeClr val="tx1"/>
+                      </a:solidFill>
+                      <a:prstDash val="solid"/>
+                      <a:round/>
+                      <a:headEnd type="none" w="med" len="med"/>
+                      <a:tailEnd type="none" w="med" len="med"/>
+                    </a:lnB>
+                    <a:noFill/>
+                  </a:tcPr>
+                </a:tc>
+                <a:extLst>
+                  <a:ext uri="{0D108BD9-81ED-4DB2-BD59-A6C34878D82A}">
+                    <a16:rowId xmlns:a16="http://schemas.microsoft.com/office/drawing/2014/main" val="3308754783"/>
+                  </a:ext>
+                </a:extLst>
+              </a:tr>
+              <a:tr h="370840">
+                <a:tc>
+                  <a:txBody>
+                    <a:bodyPr/>
+                    <a:lstStyle/>
+                    <a:p>
+                      <a:pPr algn="ctr" latinLnBrk="1">
+                        <a:lnSpc>
+                          <a:spcPct val="150000"/>
+                        </a:lnSpc>
+                      </a:pPr>
+                      <a:r>
+                        <a:rPr lang="en-US" altLang="ko-KR" sz="1000" dirty="0">
+                          <a:solidFill>
+                            <a:schemeClr val="tx1"/>
+                          </a:solidFill>
+                          <a:latin typeface="+mn-lt"/>
+                        </a:rPr>
+                        <a:t>4</a:t>
+                      </a:r>
+                      <a:endParaRPr lang="ko-KR" altLang="en-US" sz="1000" dirty="0">
+                        <a:solidFill>
+                          <a:schemeClr val="tx1"/>
+                        </a:solidFill>
+                        <a:latin typeface="+mn-lt"/>
+                      </a:endParaRPr>
+                    </a:p>
+                  </a:txBody>
+                  <a:tcPr anchor="ctr">
+                    <a:lnL w="12700" cap="flat" cmpd="sng" algn="ctr">
+                      <a:solidFill>
+                        <a:schemeClr val="tx1"/>
+                      </a:solidFill>
+                      <a:prstDash val="solid"/>
+                      <a:round/>
+                      <a:headEnd type="none" w="med" len="med"/>
+                      <a:tailEnd type="none" w="med" len="med"/>
+                    </a:lnL>
+                    <a:lnR w="12700" cap="flat" cmpd="sng" algn="ctr">
+                      <a:solidFill>
+                        <a:schemeClr val="tx1"/>
+                      </a:solidFill>
+                      <a:prstDash val="solid"/>
+                      <a:round/>
+                      <a:headEnd type="none" w="med" len="med"/>
+                      <a:tailEnd type="none" w="med" len="med"/>
+                    </a:lnR>
+                    <a:lnT w="12700" cap="flat" cmpd="sng" algn="ctr">
+                      <a:solidFill>
+                        <a:schemeClr val="tx1"/>
+                      </a:solidFill>
+                      <a:prstDash val="solid"/>
+                      <a:round/>
+                      <a:headEnd type="none" w="med" len="med"/>
+                      <a:tailEnd type="none" w="med" len="med"/>
+                    </a:lnT>
+                    <a:lnB w="12700" cap="flat" cmpd="sng" algn="ctr">
+                      <a:solidFill>
+                        <a:schemeClr val="tx1"/>
+                      </a:solidFill>
+                      <a:prstDash val="solid"/>
+                      <a:round/>
+                      <a:headEnd type="none" w="med" len="med"/>
+                      <a:tailEnd type="none" w="med" len="med"/>
+                    </a:lnB>
+                    <a:noFill/>
+                  </a:tcPr>
+                </a:tc>
+                <a:tc>
+                  <a:txBody>
+                    <a:bodyPr/>
+                    <a:lstStyle/>
+                    <a:p>
+                      <a:pPr algn="l" latinLnBrk="1">
+                        <a:lnSpc>
+                          <a:spcPct val="150000"/>
+                        </a:lnSpc>
+                      </a:pPr>
+                      <a:r>
+                        <a:rPr lang="en-US" altLang="ko-KR" sz="1000" dirty="0">
+                          <a:solidFill>
+                            <a:schemeClr val="tx1"/>
+                          </a:solidFill>
+                          <a:latin typeface="+mn-lt"/>
+                        </a:rPr>
+                        <a:t>MCU</a:t>
+                      </a:r>
+                      <a:r>
+                        <a:rPr lang="ko-KR" altLang="en-US" sz="1000" dirty="0">
+                          <a:solidFill>
+                            <a:schemeClr val="tx1"/>
+                          </a:solidFill>
+                          <a:latin typeface="+mn-lt"/>
+                        </a:rPr>
+                        <a:t>의</a:t>
+                      </a:r>
+                      <a:r>
+                        <a:rPr lang="en-US" altLang="ko-KR" sz="1000" dirty="0">
+                          <a:solidFill>
+                            <a:schemeClr val="tx1"/>
+                          </a:solidFill>
+                          <a:latin typeface="+mn-lt"/>
+                        </a:rPr>
+                        <a:t> I2C </a:t>
+                      </a:r>
+                      <a:r>
+                        <a:rPr lang="ko-KR" altLang="en-US" sz="1000" dirty="0">
+                          <a:solidFill>
+                            <a:schemeClr val="tx1"/>
+                          </a:solidFill>
+                          <a:latin typeface="+mn-lt"/>
+                        </a:rPr>
+                        <a:t>핀 할당은 정상이나</a:t>
+                      </a:r>
+                      <a:r>
+                        <a:rPr lang="en-US" altLang="ko-KR" sz="1000" dirty="0">
+                          <a:solidFill>
+                            <a:schemeClr val="tx1"/>
+                          </a:solidFill>
+                          <a:latin typeface="+mn-lt"/>
+                        </a:rPr>
+                        <a:t>, </a:t>
+                      </a:r>
+                      <a:r>
+                        <a:rPr lang="ko-KR" altLang="en-US" sz="1000" dirty="0">
+                          <a:solidFill>
+                            <a:schemeClr val="tx1"/>
+                          </a:solidFill>
+                          <a:latin typeface="+mn-lt"/>
+                        </a:rPr>
+                        <a:t>회로도 작성 과정에서 </a:t>
+                      </a:r>
+                      <a:r>
+                        <a:rPr lang="en-US" altLang="ko-KR" sz="1000" dirty="0">
+                          <a:solidFill>
+                            <a:schemeClr val="tx1"/>
+                          </a:solidFill>
+                          <a:latin typeface="+mn-lt"/>
+                        </a:rPr>
+                        <a:t>SCL</a:t>
+                      </a:r>
+                      <a:r>
+                        <a:rPr lang="ko-KR" altLang="en-US" sz="1000" dirty="0">
+                          <a:solidFill>
+                            <a:schemeClr val="tx1"/>
+                          </a:solidFill>
+                          <a:latin typeface="+mn-lt"/>
+                        </a:rPr>
+                        <a:t>과 </a:t>
+                      </a:r>
+                      <a:r>
+                        <a:rPr lang="en-US" altLang="ko-KR" sz="1000" dirty="0">
+                          <a:solidFill>
+                            <a:schemeClr val="tx1"/>
+                          </a:solidFill>
+                          <a:latin typeface="+mn-lt"/>
+                        </a:rPr>
+                        <a:t>SDA </a:t>
+                      </a:r>
+                      <a:r>
+                        <a:rPr lang="ko-KR" altLang="en-US" sz="1000" dirty="0">
+                          <a:solidFill>
+                            <a:schemeClr val="tx1"/>
+                          </a:solidFill>
+                          <a:latin typeface="+mn-lt"/>
+                        </a:rPr>
+                        <a:t>네트가 반대로 연결되어 </a:t>
+                      </a:r>
+                      <a:r>
+                        <a:rPr lang="en-US" altLang="ko-KR" sz="1000" dirty="0">
+                          <a:solidFill>
+                            <a:schemeClr val="tx1"/>
+                          </a:solidFill>
+                          <a:latin typeface="+mn-lt"/>
+                        </a:rPr>
+                        <a:t>I2C </a:t>
+                      </a:r>
+                      <a:r>
+                        <a:rPr lang="ko-KR" altLang="en-US" sz="1000" dirty="0">
+                          <a:solidFill>
+                            <a:schemeClr val="tx1"/>
+                          </a:solidFill>
+                          <a:latin typeface="+mn-lt"/>
+                        </a:rPr>
+                        <a:t>통신 불가능</a:t>
+                      </a:r>
+                    </a:p>
+                  </a:txBody>
+                  <a:tcPr anchor="ctr">
+                    <a:lnL w="12700" cap="flat" cmpd="sng" algn="ctr">
+                      <a:solidFill>
+                        <a:schemeClr val="tx1"/>
+                      </a:solidFill>
+                      <a:prstDash val="solid"/>
+                      <a:round/>
+                      <a:headEnd type="none" w="med" len="med"/>
+                      <a:tailEnd type="none" w="med" len="med"/>
+                    </a:lnL>
+                    <a:lnR w="12700" cap="flat" cmpd="sng" algn="ctr">
+                      <a:solidFill>
+                        <a:schemeClr val="tx1"/>
+                      </a:solidFill>
+                      <a:prstDash val="solid"/>
+                      <a:round/>
+                      <a:headEnd type="none" w="med" len="med"/>
+                      <a:tailEnd type="none" w="med" len="med"/>
+                    </a:lnR>
+                    <a:lnT w="12700" cap="flat" cmpd="sng" algn="ctr">
+                      <a:solidFill>
+                        <a:schemeClr val="tx1"/>
+                      </a:solidFill>
+                      <a:prstDash val="solid"/>
+                      <a:round/>
+                      <a:headEnd type="none" w="med" len="med"/>
+                      <a:tailEnd type="none" w="med" len="med"/>
+                    </a:lnT>
+                    <a:lnB w="12700" cap="flat" cmpd="sng" algn="ctr">
+                      <a:solidFill>
+                        <a:schemeClr val="tx1"/>
+                      </a:solidFill>
+                      <a:prstDash val="solid"/>
+                      <a:round/>
+                      <a:headEnd type="none" w="med" len="med"/>
+                      <a:tailEnd type="none" w="med" len="med"/>
+                    </a:lnB>
+                    <a:noFill/>
+                  </a:tcPr>
+                </a:tc>
+                <a:tc>
+                  <a:txBody>
+                    <a:bodyPr/>
+                    <a:lstStyle/>
+                    <a:p>
+                      <a:pPr algn="l" latinLnBrk="1">
+                        <a:lnSpc>
+                          <a:spcPct val="150000"/>
+                        </a:lnSpc>
+                      </a:pPr>
+                      <a:r>
+                        <a:rPr lang="en-US" altLang="ko-KR" sz="1000" dirty="0">
+                          <a:solidFill>
+                            <a:schemeClr val="tx1"/>
+                          </a:solidFill>
+                          <a:latin typeface="+mn-lt"/>
+                        </a:rPr>
+                        <a:t>PCB </a:t>
+                      </a:r>
+                      <a:r>
+                        <a:rPr lang="ko-KR" altLang="en-US" sz="1000" dirty="0">
+                          <a:solidFill>
+                            <a:schemeClr val="tx1"/>
+                          </a:solidFill>
+                          <a:latin typeface="+mn-lt"/>
+                        </a:rPr>
+                        <a:t>패턴에서 </a:t>
+                      </a:r>
+                      <a:r>
+                        <a:rPr lang="en-US" altLang="ko-KR" sz="1000" dirty="0">
+                          <a:solidFill>
+                            <a:schemeClr val="tx1"/>
+                          </a:solidFill>
+                          <a:latin typeface="+mn-lt"/>
+                        </a:rPr>
+                        <a:t>SCL/SDA </a:t>
+                      </a:r>
+                      <a:r>
+                        <a:rPr lang="ko-KR" altLang="en-US" sz="1000" dirty="0">
+                          <a:solidFill>
+                            <a:schemeClr val="tx1"/>
+                          </a:solidFill>
+                          <a:latin typeface="+mn-lt"/>
+                        </a:rPr>
+                        <a:t>연결 수정</a:t>
+                      </a:r>
+                    </a:p>
+                  </a:txBody>
+                  <a:tcPr anchor="ctr">
+                    <a:lnL w="12700" cap="flat" cmpd="sng" algn="ctr">
+                      <a:solidFill>
+                        <a:schemeClr val="tx1"/>
+                      </a:solidFill>
+                      <a:prstDash val="solid"/>
+                      <a:round/>
+                      <a:headEnd type="none" w="med" len="med"/>
+                      <a:tailEnd type="none" w="med" len="med"/>
+                    </a:lnL>
+                    <a:lnR w="12700" cap="flat" cmpd="sng" algn="ctr">
+                      <a:solidFill>
+                        <a:schemeClr val="tx1"/>
+                      </a:solidFill>
+                      <a:prstDash val="solid"/>
+                      <a:round/>
+                      <a:headEnd type="none" w="med" len="med"/>
+                      <a:tailEnd type="none" w="med" len="med"/>
+                    </a:lnR>
+                    <a:lnT w="12700" cap="flat" cmpd="sng" algn="ctr">
+                      <a:solidFill>
+                        <a:schemeClr val="tx1"/>
+                      </a:solidFill>
+                      <a:prstDash val="solid"/>
+                      <a:round/>
+                      <a:headEnd type="none" w="med" len="med"/>
+                      <a:tailEnd type="none" w="med" len="med"/>
+                    </a:lnT>
+                    <a:lnB w="12700" cap="flat" cmpd="sng" algn="ctr">
+                      <a:solidFill>
+                        <a:schemeClr val="tx1"/>
+                      </a:solidFill>
+                      <a:prstDash val="solid"/>
+                      <a:round/>
+                      <a:headEnd type="none" w="med" len="med"/>
+                      <a:tailEnd type="none" w="med" len="med"/>
+                    </a:lnB>
+                    <a:noFill/>
+                  </a:tcPr>
+                </a:tc>
+                <a:tc>
+                  <a:txBody>
+                    <a:bodyPr/>
+                    <a:lstStyle/>
+                    <a:p>
+                      <a:pPr algn="ctr" latinLnBrk="1">
+                        <a:lnSpc>
+                          <a:spcPct val="150000"/>
+                        </a:lnSpc>
+                      </a:pPr>
+                      <a:r>
+                        <a:rPr lang="ko-KR" altLang="en-US" sz="1000" dirty="0">
+                          <a:solidFill>
+                            <a:schemeClr val="tx1"/>
+                          </a:solidFill>
+                          <a:latin typeface="+mn-lt"/>
+                        </a:rPr>
+                        <a:t>완료</a:t>
+                      </a:r>
+                    </a:p>
+                  </a:txBody>
+                  <a:tcPr anchor="ctr">
+                    <a:lnL w="12700" cap="flat" cmpd="sng" algn="ctr">
+                      <a:solidFill>
+                        <a:schemeClr val="tx1"/>
+                      </a:solidFill>
+                      <a:prstDash val="solid"/>
+                      <a:round/>
+                      <a:headEnd type="none" w="med" len="med"/>
+                      <a:tailEnd type="none" w="med" len="med"/>
+                    </a:lnL>
+                    <a:lnR w="12700" cap="flat" cmpd="sng" algn="ctr">
+                      <a:solidFill>
+                        <a:schemeClr val="tx1"/>
+                      </a:solidFill>
+                      <a:prstDash val="solid"/>
+                      <a:round/>
+                      <a:headEnd type="none" w="med" len="med"/>
+                      <a:tailEnd type="none" w="med" len="med"/>
+                    </a:lnR>
+                    <a:lnT w="12700" cap="flat" cmpd="sng" algn="ctr">
+                      <a:solidFill>
+                        <a:schemeClr val="tx1"/>
+                      </a:solidFill>
+                      <a:prstDash val="solid"/>
+                      <a:round/>
+                      <a:headEnd type="none" w="med" len="med"/>
+                      <a:tailEnd type="none" w="med" len="med"/>
+                    </a:lnT>
+                    <a:lnB w="12700" cap="flat" cmpd="sng" algn="ctr">
+                      <a:solidFill>
+                        <a:schemeClr val="tx1"/>
+                      </a:solidFill>
+                      <a:prstDash val="solid"/>
+                      <a:round/>
+                      <a:headEnd type="none" w="med" len="med"/>
+                      <a:tailEnd type="none" w="med" len="med"/>
+                    </a:lnB>
+                    <a:noFill/>
+                  </a:tcPr>
+                </a:tc>
+                <a:extLst>
+                  <a:ext uri="{0D108BD9-81ED-4DB2-BD59-A6C34878D82A}">
+                    <a16:rowId xmlns:a16="http://schemas.microsoft.com/office/drawing/2014/main" val="2183807056"/>
+                  </a:ext>
+                </a:extLst>
+              </a:tr>
+            </a:tbl>
+          </a:graphicData>
+        </a:graphic>
+      </p:graphicFrame>
+    </p:spTree>
+    <p:extLst>
+      <p:ext uri="{BB962C8B-B14F-4D97-AF65-F5344CB8AC3E}">
+        <p14:creationId xmlns:p14="http://schemas.microsoft.com/office/powerpoint/2010/main" val="121219287"/>
+      </p:ext>
+    </p:extLst>
+  </p:cSld>
+  <p:clrMapOvr>
+    <a:masterClrMapping/>
+  </p:clrMapOvr>
+</p:sld>
+</file>
+
+<file path=ppt/slides/slide3.xml><?xml version="1.0" encoding="utf-8"?>
+<p:sld xmlns:a="http://schemas.openxmlformats.org/drawingml/2006/main" xmlns:r="http://schemas.openxmlformats.org/officeDocument/2006/relationships" xmlns:p="http://schemas.openxmlformats.org/presentationml/2006/main">
+  <p:cSld>
+    <p:spTree>
+      <p:nvGrpSpPr>
+        <p:cNvPr id="1" name="">
+          <a:extLst>
+            <a:ext uri="{FF2B5EF4-FFF2-40B4-BE49-F238E27FC236}">
               <a16:creationId xmlns:a16="http://schemas.microsoft.com/office/drawing/2014/main" id="{1D7F57CA-D185-337E-4595-8AFDB36E9931}"/>
             </a:ext>
           </a:extLst>
@@ -5084,11 +8495,19 @@
             </a:pPr>
             <a:r>
               <a:rPr lang="en-US" sz="3200" b="1" dirty="0">
-                <a:latin typeface="Calibri Light" panose="020F0302020204030204" pitchFamily="34" charset="0"/>
                 <a:cs typeface="Calibri Light" panose="020F0302020204030204" pitchFamily="34" charset="0"/>
               </a:rPr>
-              <a:t>SIO1P Source</a:t>
-            </a:r>
+              <a:t>SIO1P Pull-Up </a:t>
+            </a:r>
+            <a:r>
+              <a:rPr lang="ko-KR" altLang="en-US" sz="3200" b="1" dirty="0">
+                <a:cs typeface="Calibri Light" panose="020F0302020204030204" pitchFamily="34" charset="0"/>
+              </a:rPr>
+              <a:t>전원 시퀀스 이슈</a:t>
+            </a:r>
+            <a:endParaRPr lang="en-US" sz="3200" b="1" dirty="0">
+              <a:cs typeface="Calibri Light" panose="020F0302020204030204" pitchFamily="34" charset="0"/>
+            </a:endParaRPr>
           </a:p>
         </p:txBody>
       </p:sp>
@@ -5105,7 +8524,7 @@
 </p:sld>
 </file>
 
-<file path=ppt/slides/slide3.xml><?xml version="1.0" encoding="utf-8"?>
+<file path=ppt/slides/slide4.xml><?xml version="1.0" encoding="utf-8"?>
 <p:sld xmlns:a="http://schemas.openxmlformats.org/drawingml/2006/main" xmlns:r="http://schemas.openxmlformats.org/officeDocument/2006/relationships" xmlns:p="http://schemas.openxmlformats.org/presentationml/2006/main">
   <p:cSld>
     <p:spTree>
@@ -5155,7 +8574,7 @@
                 <a:cs typeface="Calibri Light" panose="020F0302020204030204" pitchFamily="34" charset="0"/>
               </a:rPr>
               <a:pPr/>
-              <a:t>3</a:t>
+              <a:t>4</a:t>
             </a:fld>
             <a:endParaRPr lang="en-US" dirty="0">
               <a:latin typeface="Calibri Light" panose="020F0302020204030204" pitchFamily="34" charset="0"/>
@@ -5194,13 +8613,20 @@
           <a:p>
             <a:r>
               <a:rPr lang="en-US" altLang="ko-KR" b="1" dirty="0">
-                <a:latin typeface="Calibri Light" panose="020F0302020204030204" pitchFamily="34" charset="0"/>
+                <a:latin typeface="+mj-lt"/>
                 <a:cs typeface="Calibri Light" panose="020F0302020204030204" pitchFamily="34" charset="0"/>
               </a:rPr>
-              <a:t>SIO1P Source</a:t>
+              <a:t>SIO1P Pull-Up </a:t>
+            </a:r>
+            <a:r>
+              <a:rPr lang="ko-KR" altLang="en-US" b="1" dirty="0">
+                <a:latin typeface="+mj-lt"/>
+                <a:cs typeface="Calibri Light" panose="020F0302020204030204" pitchFamily="34" charset="0"/>
+              </a:rPr>
+              <a:t>전원 시퀀스 이슈</a:t>
             </a:r>
             <a:endParaRPr lang="en-US" altLang="ko-KR" dirty="0">
-              <a:latin typeface="Arial" panose="020B0604020202020204" pitchFamily="34" charset="0"/>
+              <a:latin typeface="+mj-lt"/>
               <a:cs typeface="Arial" panose="020B0604020202020204" pitchFamily="34" charset="0"/>
             </a:endParaRPr>
           </a:p>
@@ -5509,6 +8935,236 @@
           </a:p>
         </p:txBody>
       </p:sp>
+      <p:cxnSp>
+        <p:nvCxnSpPr>
+          <p:cNvPr id="6" name="직선 화살표 연결선 5">
+            <a:extLst>
+              <a:ext uri="{FF2B5EF4-FFF2-40B4-BE49-F238E27FC236}">
+                <a16:creationId xmlns:a16="http://schemas.microsoft.com/office/drawing/2014/main" id="{EF32B5E7-56C6-A8E9-56A4-9CCF9E88CC53}"/>
+              </a:ext>
+            </a:extLst>
+          </p:cNvPr>
+          <p:cNvCxnSpPr/>
+          <p:nvPr/>
+        </p:nvCxnSpPr>
+        <p:spPr>
+          <a:xfrm>
+            <a:off x="1543050" y="1962150"/>
+            <a:ext cx="0" cy="323850"/>
+          </a:xfrm>
+          <a:prstGeom prst="straightConnector1">
+            <a:avLst/>
+          </a:prstGeom>
+          <a:ln>
+            <a:solidFill>
+              <a:srgbClr val="FF0000"/>
+            </a:solidFill>
+            <a:tailEnd type="triangle"/>
+          </a:ln>
+        </p:spPr>
+        <p:style>
+          <a:lnRef idx="2">
+            <a:schemeClr val="accent1"/>
+          </a:lnRef>
+          <a:fillRef idx="0">
+            <a:schemeClr val="accent1"/>
+          </a:fillRef>
+          <a:effectRef idx="1">
+            <a:schemeClr val="accent1"/>
+          </a:effectRef>
+          <a:fontRef idx="minor">
+            <a:schemeClr val="tx1"/>
+          </a:fontRef>
+        </p:style>
+      </p:cxnSp>
+      <p:cxnSp>
+        <p:nvCxnSpPr>
+          <p:cNvPr id="8" name="직선 화살표 연결선 7">
+            <a:extLst>
+              <a:ext uri="{FF2B5EF4-FFF2-40B4-BE49-F238E27FC236}">
+                <a16:creationId xmlns:a16="http://schemas.microsoft.com/office/drawing/2014/main" id="{0B6C2DA3-0DF3-3D2B-24D1-979EE8B76A7C}"/>
+              </a:ext>
+            </a:extLst>
+          </p:cNvPr>
+          <p:cNvCxnSpPr/>
+          <p:nvPr/>
+        </p:nvCxnSpPr>
+        <p:spPr>
+          <a:xfrm>
+            <a:off x="1543050" y="2938697"/>
+            <a:ext cx="0" cy="323850"/>
+          </a:xfrm>
+          <a:prstGeom prst="straightConnector1">
+            <a:avLst/>
+          </a:prstGeom>
+          <a:ln>
+            <a:solidFill>
+              <a:srgbClr val="FF0000"/>
+            </a:solidFill>
+            <a:tailEnd type="triangle"/>
+          </a:ln>
+        </p:spPr>
+        <p:style>
+          <a:lnRef idx="2">
+            <a:schemeClr val="accent1"/>
+          </a:lnRef>
+          <a:fillRef idx="0">
+            <a:schemeClr val="accent1"/>
+          </a:fillRef>
+          <a:effectRef idx="1">
+            <a:schemeClr val="accent1"/>
+          </a:effectRef>
+          <a:fontRef idx="minor">
+            <a:schemeClr val="tx1"/>
+          </a:fontRef>
+        </p:style>
+      </p:cxnSp>
+      <p:sp>
+        <p:nvSpPr>
+          <p:cNvPr id="11" name="TextBox 10">
+            <a:extLst>
+              <a:ext uri="{FF2B5EF4-FFF2-40B4-BE49-F238E27FC236}">
+                <a16:creationId xmlns:a16="http://schemas.microsoft.com/office/drawing/2014/main" id="{42633EE3-0F0A-5561-F7B9-446269A65BB0}"/>
+              </a:ext>
+            </a:extLst>
+          </p:cNvPr>
+          <p:cNvSpPr txBox="1"/>
+          <p:nvPr/>
+        </p:nvSpPr>
+        <p:spPr>
+          <a:xfrm>
+            <a:off x="392581" y="630922"/>
+            <a:ext cx="7375737" cy="524246"/>
+          </a:xfrm>
+          <a:prstGeom prst="rect">
+            <a:avLst/>
+          </a:prstGeom>
+          <a:noFill/>
+        </p:spPr>
+        <p:txBody>
+          <a:bodyPr wrap="none" rtlCol="0">
+            <a:spAutoFit/>
+          </a:bodyPr>
+          <a:lstStyle/>
+          <a:p>
+            <a:pPr>
+              <a:lnSpc>
+                <a:spcPct val="150000"/>
+              </a:lnSpc>
+            </a:pPr>
+            <a:r>
+              <a:rPr lang="ko-KR" altLang="en-US" sz="1000" dirty="0"/>
+              <a:t>개선 전</a:t>
+            </a:r>
+            <a:endParaRPr lang="en-US" altLang="ko-KR" sz="1000" dirty="0"/>
+          </a:p>
+          <a:p>
+            <a:pPr>
+              <a:lnSpc>
+                <a:spcPct val="150000"/>
+              </a:lnSpc>
+            </a:pPr>
+            <a:r>
+              <a:rPr lang="en-US" altLang="ko-KR" sz="1000" dirty="0"/>
+              <a:t> - SIO1P Pull-Up </a:t>
+            </a:r>
+            <a:r>
+              <a:rPr lang="ko-KR" altLang="en-US" sz="1000" dirty="0"/>
+              <a:t>전원</a:t>
+            </a:r>
+            <a:r>
+              <a:rPr lang="en-US" altLang="ko-KR" sz="1000" dirty="0"/>
+              <a:t>(VDD_5V)</a:t>
+            </a:r>
+            <a:r>
+              <a:rPr lang="ko-KR" altLang="en-US" sz="1000" dirty="0"/>
+              <a:t>이 </a:t>
+            </a:r>
+            <a:r>
+              <a:rPr lang="en-US" altLang="ko-KR" sz="1000" dirty="0"/>
+              <a:t>ID804_VDD</a:t>
+            </a:r>
+            <a:r>
+              <a:rPr lang="ko-KR" altLang="en-US" sz="1000" dirty="0"/>
+              <a:t>보다 먼저 인가되어</a:t>
+            </a:r>
+            <a:r>
+              <a:rPr lang="en-US" altLang="ko-KR" sz="1000" dirty="0"/>
+              <a:t>, SIO1P</a:t>
+            </a:r>
+            <a:r>
+              <a:rPr lang="ko-KR" altLang="en-US" sz="1000" dirty="0"/>
+              <a:t>의 내부 경로를 통해 </a:t>
+            </a:r>
+            <a:r>
+              <a:rPr lang="en-US" altLang="ko-KR" sz="1000" dirty="0"/>
+              <a:t>ID804_VDD</a:t>
+            </a:r>
+            <a:r>
+              <a:rPr lang="ko-KR" altLang="en-US" sz="1000" dirty="0"/>
+              <a:t>에 역공급이 발생함</a:t>
+            </a:r>
+            <a:r>
+              <a:rPr lang="en-US" altLang="ko-KR" sz="1000" dirty="0"/>
+              <a:t>.</a:t>
+            </a:r>
+            <a:endParaRPr lang="ko-KR" altLang="en-US" sz="1000" dirty="0"/>
+          </a:p>
+        </p:txBody>
+      </p:sp>
+      <p:sp>
+        <p:nvSpPr>
+          <p:cNvPr id="17" name="TextBox 16">
+            <a:extLst>
+              <a:ext uri="{FF2B5EF4-FFF2-40B4-BE49-F238E27FC236}">
+                <a16:creationId xmlns:a16="http://schemas.microsoft.com/office/drawing/2014/main" id="{3D24FD6B-9540-C307-41EE-85BF37CB7516}"/>
+              </a:ext>
+            </a:extLst>
+          </p:cNvPr>
+          <p:cNvSpPr txBox="1"/>
+          <p:nvPr/>
+        </p:nvSpPr>
+        <p:spPr>
+          <a:xfrm>
+            <a:off x="470883" y="4661907"/>
+            <a:ext cx="3211135" cy="246221"/>
+          </a:xfrm>
+          <a:prstGeom prst="rect">
+            <a:avLst/>
+          </a:prstGeom>
+          <a:noFill/>
+          <a:ln>
+            <a:solidFill>
+              <a:schemeClr val="accent1"/>
+            </a:solidFill>
+          </a:ln>
+        </p:spPr>
+        <p:txBody>
+          <a:bodyPr wrap="none" rtlCol="0">
+            <a:spAutoFit/>
+          </a:bodyPr>
+          <a:lstStyle/>
+          <a:p>
+            <a:pPr algn="ctr"/>
+            <a:r>
+              <a:rPr lang="en-US" altLang="ko-KR" sz="1000" dirty="0"/>
+              <a:t>SIO1P Pull-Up </a:t>
+            </a:r>
+            <a:r>
+              <a:rPr lang="ko-KR" altLang="en-US" sz="1000" dirty="0"/>
+              <a:t>전원 인가 → </a:t>
+            </a:r>
+            <a:r>
+              <a:rPr lang="en-US" altLang="ko-KR" sz="1000" dirty="0"/>
+              <a:t>ID804_VDD </a:t>
+            </a:r>
+            <a:r>
+              <a:rPr lang="ko-KR" altLang="en-US" sz="1000" dirty="0"/>
+              <a:t>비정상 상승</a:t>
+            </a:r>
+          </a:p>
+        </p:txBody>
+      </p:sp>
     </p:spTree>
     <p:extLst>
       <p:ext uri="{BB962C8B-B14F-4D97-AF65-F5344CB8AC3E}">
@@ -5522,7 +9178,7 @@
 </p:sld>
 </file>
 
-<file path=ppt/slides/slide4.xml><?xml version="1.0" encoding="utf-8"?>
+<file path=ppt/slides/slide5.xml><?xml version="1.0" encoding="utf-8"?>
 <p:sld xmlns:a="http://schemas.openxmlformats.org/drawingml/2006/main" xmlns:r="http://schemas.openxmlformats.org/officeDocument/2006/relationships" xmlns:p="http://schemas.openxmlformats.org/presentationml/2006/main">
   <p:cSld>
     <p:spTree>
@@ -5572,7 +9228,7 @@
                 <a:cs typeface="Calibri Light" panose="020F0302020204030204" pitchFamily="34" charset="0"/>
               </a:rPr>
               <a:pPr/>
-              <a:t>4</a:t>
+              <a:t>5</a:t>
             </a:fld>
             <a:endParaRPr lang="en-US" dirty="0">
               <a:latin typeface="Calibri Light" panose="020F0302020204030204" pitchFamily="34" charset="0"/>
@@ -5611,13 +9267,17 @@
           <a:p>
             <a:r>
               <a:rPr lang="en-US" altLang="ko-KR" b="1" dirty="0">
-                <a:latin typeface="Calibri Light" panose="020F0302020204030204" pitchFamily="34" charset="0"/>
                 <a:cs typeface="Calibri Light" panose="020F0302020204030204" pitchFamily="34" charset="0"/>
               </a:rPr>
-              <a:t>SIO1P Source</a:t>
+              <a:t>SIO1P Pull-Up </a:t>
+            </a:r>
+            <a:r>
+              <a:rPr lang="ko-KR" altLang="en-US" b="1" dirty="0">
+                <a:cs typeface="Calibri Light" panose="020F0302020204030204" pitchFamily="34" charset="0"/>
+              </a:rPr>
+              <a:t>전원 시퀀스 이슈</a:t>
             </a:r>
             <a:endParaRPr lang="en-US" altLang="ko-KR" dirty="0">
-              <a:latin typeface="Arial" panose="020B0604020202020204" pitchFamily="34" charset="0"/>
               <a:cs typeface="Arial" panose="020B0604020202020204" pitchFamily="34" charset="0"/>
             </a:endParaRPr>
           </a:p>
@@ -5959,6 +9619,245 @@
           </a:p>
         </p:txBody>
       </p:sp>
+      <p:sp>
+        <p:nvSpPr>
+          <p:cNvPr id="5" name="TextBox 4">
+            <a:extLst>
+              <a:ext uri="{FF2B5EF4-FFF2-40B4-BE49-F238E27FC236}">
+                <a16:creationId xmlns:a16="http://schemas.microsoft.com/office/drawing/2014/main" id="{701DB475-9325-F8A5-A63A-60E4DD2C243A}"/>
+              </a:ext>
+            </a:extLst>
+          </p:cNvPr>
+          <p:cNvSpPr txBox="1"/>
+          <p:nvPr/>
+        </p:nvSpPr>
+        <p:spPr>
+          <a:xfrm>
+            <a:off x="392581" y="630922"/>
+            <a:ext cx="6827510" cy="524246"/>
+          </a:xfrm>
+          <a:prstGeom prst="rect">
+            <a:avLst/>
+          </a:prstGeom>
+          <a:noFill/>
+        </p:spPr>
+        <p:txBody>
+          <a:bodyPr wrap="none" rtlCol="0">
+            <a:spAutoFit/>
+          </a:bodyPr>
+          <a:lstStyle/>
+          <a:p>
+            <a:pPr>
+              <a:lnSpc>
+                <a:spcPct val="150000"/>
+              </a:lnSpc>
+            </a:pPr>
+            <a:r>
+              <a:rPr lang="ko-KR" altLang="en-US" sz="1000" dirty="0"/>
+              <a:t>개선 후</a:t>
+            </a:r>
+            <a:endParaRPr lang="en-US" altLang="ko-KR" sz="1000" dirty="0"/>
+          </a:p>
+          <a:p>
+            <a:pPr>
+              <a:lnSpc>
+                <a:spcPct val="150000"/>
+              </a:lnSpc>
+            </a:pPr>
+            <a:r>
+              <a:rPr lang="en-US" altLang="ko-KR" sz="1000" dirty="0"/>
+              <a:t> - SIO1P Pull-Up </a:t>
+            </a:r>
+            <a:r>
+              <a:rPr lang="ko-KR" altLang="en-US" sz="1000" dirty="0"/>
+              <a:t>전원을 </a:t>
+            </a:r>
+            <a:r>
+              <a:rPr lang="en-US" altLang="ko-KR" sz="1000" dirty="0"/>
+              <a:t>ID804_VDD </a:t>
+            </a:r>
+            <a:r>
+              <a:rPr lang="ko-KR" altLang="en-US" sz="1000" dirty="0"/>
+              <a:t>전원 도메인으로 변경하여</a:t>
+            </a:r>
+            <a:r>
+              <a:rPr lang="en-US" altLang="ko-KR" sz="1000" dirty="0"/>
+              <a:t>,ID804_VDD </a:t>
+            </a:r>
+            <a:r>
+              <a:rPr lang="ko-KR" altLang="en-US" sz="1000" dirty="0"/>
+              <a:t>인가 전 </a:t>
+            </a:r>
+            <a:r>
+              <a:rPr lang="en-US" altLang="ko-KR" sz="1000" dirty="0"/>
+              <a:t>SIO1P</a:t>
+            </a:r>
+            <a:r>
+              <a:rPr lang="ko-KR" altLang="en-US" sz="1000" dirty="0"/>
+              <a:t>를 통한 역공급을 방지함</a:t>
+            </a:r>
+            <a:r>
+              <a:rPr lang="en-US" altLang="ko-KR" sz="1000" dirty="0"/>
+              <a:t>.</a:t>
+            </a:r>
+            <a:endParaRPr lang="ko-KR" altLang="en-US" sz="1000" dirty="0"/>
+          </a:p>
+        </p:txBody>
+      </p:sp>
+      <p:cxnSp>
+        <p:nvCxnSpPr>
+          <p:cNvPr id="2" name="직선 화살표 연결선 1">
+            <a:extLst>
+              <a:ext uri="{FF2B5EF4-FFF2-40B4-BE49-F238E27FC236}">
+                <a16:creationId xmlns:a16="http://schemas.microsoft.com/office/drawing/2014/main" id="{41474E37-F682-BE0D-63FC-40081320430B}"/>
+              </a:ext>
+            </a:extLst>
+          </p:cNvPr>
+          <p:cNvCxnSpPr/>
+          <p:nvPr/>
+        </p:nvCxnSpPr>
+        <p:spPr>
+          <a:xfrm>
+            <a:off x="1543050" y="1962150"/>
+            <a:ext cx="0" cy="323850"/>
+          </a:xfrm>
+          <a:prstGeom prst="straightConnector1">
+            <a:avLst/>
+          </a:prstGeom>
+          <a:ln>
+            <a:solidFill>
+              <a:srgbClr val="FF0000"/>
+            </a:solidFill>
+            <a:tailEnd type="triangle"/>
+          </a:ln>
+        </p:spPr>
+        <p:style>
+          <a:lnRef idx="2">
+            <a:schemeClr val="accent1"/>
+          </a:lnRef>
+          <a:fillRef idx="0">
+            <a:schemeClr val="accent1"/>
+          </a:fillRef>
+          <a:effectRef idx="1">
+            <a:schemeClr val="accent1"/>
+          </a:effectRef>
+          <a:fontRef idx="minor">
+            <a:schemeClr val="tx1"/>
+          </a:fontRef>
+        </p:style>
+      </p:cxnSp>
+      <p:cxnSp>
+        <p:nvCxnSpPr>
+          <p:cNvPr id="6" name="직선 화살표 연결선 5">
+            <a:extLst>
+              <a:ext uri="{FF2B5EF4-FFF2-40B4-BE49-F238E27FC236}">
+                <a16:creationId xmlns:a16="http://schemas.microsoft.com/office/drawing/2014/main" id="{D94A29D0-BC4C-961C-3B9A-00E4E04E2CAA}"/>
+              </a:ext>
+            </a:extLst>
+          </p:cNvPr>
+          <p:cNvCxnSpPr/>
+          <p:nvPr/>
+        </p:nvCxnSpPr>
+        <p:spPr>
+          <a:xfrm>
+            <a:off x="1543050" y="2938697"/>
+            <a:ext cx="0" cy="323850"/>
+          </a:xfrm>
+          <a:prstGeom prst="straightConnector1">
+            <a:avLst/>
+          </a:prstGeom>
+          <a:ln>
+            <a:solidFill>
+              <a:srgbClr val="FF0000"/>
+            </a:solidFill>
+            <a:tailEnd type="triangle"/>
+          </a:ln>
+        </p:spPr>
+        <p:style>
+          <a:lnRef idx="2">
+            <a:schemeClr val="accent1"/>
+          </a:lnRef>
+          <a:fillRef idx="0">
+            <a:schemeClr val="accent1"/>
+          </a:fillRef>
+          <a:effectRef idx="1">
+            <a:schemeClr val="accent1"/>
+          </a:effectRef>
+          <a:fontRef idx="minor">
+            <a:schemeClr val="tx1"/>
+          </a:fontRef>
+        </p:style>
+      </p:cxnSp>
+      <p:sp>
+        <p:nvSpPr>
+          <p:cNvPr id="7" name="TextBox 6">
+            <a:extLst>
+              <a:ext uri="{FF2B5EF4-FFF2-40B4-BE49-F238E27FC236}">
+                <a16:creationId xmlns:a16="http://schemas.microsoft.com/office/drawing/2014/main" id="{06D94A1E-E91A-99D2-B48E-ECA56C7BB360}"/>
+              </a:ext>
+            </a:extLst>
+          </p:cNvPr>
+          <p:cNvSpPr txBox="1"/>
+          <p:nvPr/>
+        </p:nvSpPr>
+        <p:spPr>
+          <a:xfrm>
+            <a:off x="430429" y="4565300"/>
+            <a:ext cx="4682692" cy="246221"/>
+          </a:xfrm>
+          <a:prstGeom prst="rect">
+            <a:avLst/>
+          </a:prstGeom>
+          <a:noFill/>
+          <a:ln>
+            <a:solidFill>
+              <a:schemeClr val="accent1"/>
+            </a:solidFill>
+          </a:ln>
+        </p:spPr>
+        <p:txBody>
+          <a:bodyPr wrap="none" rtlCol="0">
+            <a:spAutoFit/>
+          </a:bodyPr>
+          <a:lstStyle/>
+          <a:p>
+            <a:pPr algn="ctr"/>
+            <a:r>
+              <a:rPr lang="en-US" altLang="ko-KR" sz="1000" dirty="0"/>
+              <a:t>ID804_VDD</a:t>
+            </a:r>
+            <a:r>
+              <a:rPr lang="ko-KR" altLang="en-US" sz="1000" dirty="0"/>
+              <a:t>와 </a:t>
+            </a:r>
+            <a:r>
+              <a:rPr lang="en-US" altLang="ko-KR" sz="1000" dirty="0"/>
+              <a:t>SIO1P Pull-Up </a:t>
+            </a:r>
+            <a:r>
+              <a:rPr lang="ko-KR" altLang="en-US" sz="1000" dirty="0"/>
+              <a:t>전원 시퀀스 일치→ </a:t>
+            </a:r>
+            <a:r>
+              <a:rPr lang="en-US" altLang="ko-KR" sz="1000" dirty="0"/>
+              <a:t>ID804_VDD </a:t>
+            </a:r>
+            <a:r>
+              <a:rPr lang="ko-KR" altLang="en-US" sz="1000" dirty="0" err="1"/>
+              <a:t>역급전</a:t>
+            </a:r>
+            <a:r>
+              <a:rPr lang="ko-KR" altLang="en-US" sz="1000" dirty="0"/>
+              <a:t> </a:t>
+            </a:r>
+            <a:r>
+              <a:rPr lang="ko-KR" altLang="en-US" sz="1000" dirty="0" err="1"/>
+              <a:t>미발생</a:t>
+            </a:r>
+            <a:endParaRPr lang="ko-KR" altLang="en-US" sz="1000" dirty="0"/>
+          </a:p>
+        </p:txBody>
+      </p:sp>
     </p:spTree>
     <p:extLst>
       <p:ext uri="{BB962C8B-B14F-4D97-AF65-F5344CB8AC3E}">
@@ -5972,7 +9871,7 @@
 </p:sld>
 </file>
 
-<file path=ppt/slides/slide5.xml><?xml version="1.0" encoding="utf-8"?>
+<file path=ppt/slides/slide6.xml><?xml version="1.0" encoding="utf-8"?>
 <p:sld xmlns:a="http://schemas.openxmlformats.org/drawingml/2006/main" xmlns:r="http://schemas.openxmlformats.org/officeDocument/2006/relationships" xmlns:p="http://schemas.openxmlformats.org/presentationml/2006/main">
   <p:cSld>
     <p:spTree>
@@ -6030,11 +9929,19 @@
             </a:pPr>
             <a:r>
               <a:rPr lang="en-US" sz="3200" b="1" dirty="0">
-                <a:latin typeface="Calibri Light" panose="020F0302020204030204" pitchFamily="34" charset="0"/>
                 <a:cs typeface="Calibri Light" panose="020F0302020204030204" pitchFamily="34" charset="0"/>
               </a:rPr>
-              <a:t>VDD Ripple</a:t>
-            </a:r>
+              <a:t>ID804_VDD </a:t>
+            </a:r>
+            <a:r>
+              <a:rPr lang="ko-KR" altLang="en-US" sz="3200" b="1" dirty="0">
+                <a:cs typeface="Calibri Light" panose="020F0302020204030204" pitchFamily="34" charset="0"/>
+              </a:rPr>
+              <a:t>전원 안정성 이슈</a:t>
+            </a:r>
+            <a:endParaRPr lang="en-US" sz="3200" b="1" dirty="0">
+              <a:cs typeface="Calibri Light" panose="020F0302020204030204" pitchFamily="34" charset="0"/>
+            </a:endParaRPr>
           </a:p>
         </p:txBody>
       </p:sp>
@@ -6051,7 +9958,7 @@
 </p:sld>
 </file>
 
-<file path=ppt/slides/slide6.xml><?xml version="1.0" encoding="utf-8"?>
+<file path=ppt/slides/slide7.xml><?xml version="1.0" encoding="utf-8"?>
 <p:sld xmlns:a="http://schemas.openxmlformats.org/drawingml/2006/main" xmlns:r="http://schemas.openxmlformats.org/officeDocument/2006/relationships" xmlns:p="http://schemas.openxmlformats.org/presentationml/2006/main">
   <p:cSld>
     <p:spTree>
@@ -6101,7 +10008,7 @@
                 <a:cs typeface="Calibri Light" panose="020F0302020204030204" pitchFamily="34" charset="0"/>
               </a:rPr>
               <a:pPr/>
-              <a:t>6</a:t>
+              <a:t>7</a:t>
             </a:fld>
             <a:endParaRPr lang="en-US" dirty="0">
               <a:latin typeface="Calibri Light" panose="020F0302020204030204" pitchFamily="34" charset="0"/>
@@ -6140,13 +10047,20 @@
           <a:p>
             <a:r>
               <a:rPr lang="en-US" altLang="ko-KR" b="1" dirty="0">
-                <a:latin typeface="Calibri Light" panose="020F0302020204030204" pitchFamily="34" charset="0"/>
+                <a:latin typeface="+mj-lt"/>
                 <a:cs typeface="Calibri Light" panose="020F0302020204030204" pitchFamily="34" charset="0"/>
               </a:rPr>
-              <a:t>VDD Ripple</a:t>
+              <a:t>ID804_VDD </a:t>
+            </a:r>
+            <a:r>
+              <a:rPr lang="ko-KR" altLang="en-US" b="1" dirty="0">
+                <a:latin typeface="+mj-lt"/>
+                <a:cs typeface="Calibri Light" panose="020F0302020204030204" pitchFamily="34" charset="0"/>
+              </a:rPr>
+              <a:t>전원 안정성 이슈</a:t>
             </a:r>
             <a:endParaRPr lang="en-US" altLang="ko-KR" dirty="0">
-              <a:latin typeface="Arial" panose="020B0604020202020204" pitchFamily="34" charset="0"/>
+              <a:latin typeface="+mj-lt"/>
               <a:cs typeface="Arial" panose="020B0604020202020204" pitchFamily="34" charset="0"/>
             </a:endParaRPr>
           </a:p>
@@ -6222,6 +10136,251 @@
           </a:prstGeom>
         </p:spPr>
       </p:pic>
+      <p:sp>
+        <p:nvSpPr>
+          <p:cNvPr id="4" name="직사각형 3">
+            <a:extLst>
+              <a:ext uri="{FF2B5EF4-FFF2-40B4-BE49-F238E27FC236}">
+                <a16:creationId xmlns:a16="http://schemas.microsoft.com/office/drawing/2014/main" id="{DD2C671A-B219-27CE-578A-04F43B051FD9}"/>
+              </a:ext>
+            </a:extLst>
+          </p:cNvPr>
+          <p:cNvSpPr/>
+          <p:nvPr/>
+        </p:nvSpPr>
+        <p:spPr>
+          <a:xfrm>
+            <a:off x="8937860" y="3216029"/>
+            <a:ext cx="406165" cy="289171"/>
+          </a:xfrm>
+          <a:prstGeom prst="rect">
+            <a:avLst/>
+          </a:prstGeom>
+          <a:solidFill>
+            <a:srgbClr val="FFFF00">
+              <a:alpha val="50000"/>
+            </a:srgbClr>
+          </a:solidFill>
+          <a:ln>
+            <a:solidFill>
+              <a:srgbClr val="FF0000"/>
+            </a:solidFill>
+          </a:ln>
+        </p:spPr>
+        <p:style>
+          <a:lnRef idx="2">
+            <a:schemeClr val="accent1">
+              <a:shade val="15000"/>
+            </a:schemeClr>
+          </a:lnRef>
+          <a:fillRef idx="1">
+            <a:schemeClr val="accent1"/>
+          </a:fillRef>
+          <a:effectRef idx="0">
+            <a:schemeClr val="accent1"/>
+          </a:effectRef>
+          <a:fontRef idx="minor">
+            <a:schemeClr val="lt1"/>
+          </a:fontRef>
+        </p:style>
+        <p:txBody>
+          <a:bodyPr rtlCol="0" anchor="ctr"/>
+          <a:lstStyle/>
+          <a:p>
+            <a:pPr algn="ctr"/>
+            <a:endParaRPr lang="ko-KR" altLang="en-US"/>
+          </a:p>
+        </p:txBody>
+      </p:sp>
+      <p:sp>
+        <p:nvSpPr>
+          <p:cNvPr id="7" name="직사각형 6">
+            <a:extLst>
+              <a:ext uri="{FF2B5EF4-FFF2-40B4-BE49-F238E27FC236}">
+                <a16:creationId xmlns:a16="http://schemas.microsoft.com/office/drawing/2014/main" id="{9BD3C2C8-5B94-6104-2767-615E8D6B7AA8}"/>
+              </a:ext>
+            </a:extLst>
+          </p:cNvPr>
+          <p:cNvSpPr/>
+          <p:nvPr/>
+        </p:nvSpPr>
+        <p:spPr>
+          <a:xfrm>
+            <a:off x="10150592" y="3300043"/>
+            <a:ext cx="485423" cy="289171"/>
+          </a:xfrm>
+          <a:prstGeom prst="rect">
+            <a:avLst/>
+          </a:prstGeom>
+          <a:solidFill>
+            <a:srgbClr val="FFFF00">
+              <a:alpha val="50000"/>
+            </a:srgbClr>
+          </a:solidFill>
+          <a:ln>
+            <a:solidFill>
+              <a:srgbClr val="FF0000"/>
+            </a:solidFill>
+          </a:ln>
+        </p:spPr>
+        <p:style>
+          <a:lnRef idx="2">
+            <a:schemeClr val="accent1">
+              <a:shade val="15000"/>
+            </a:schemeClr>
+          </a:lnRef>
+          <a:fillRef idx="1">
+            <a:schemeClr val="accent1"/>
+          </a:fillRef>
+          <a:effectRef idx="0">
+            <a:schemeClr val="accent1"/>
+          </a:effectRef>
+          <a:fontRef idx="minor">
+            <a:schemeClr val="lt1"/>
+          </a:fontRef>
+        </p:style>
+        <p:txBody>
+          <a:bodyPr rtlCol="0" anchor="ctr"/>
+          <a:lstStyle/>
+          <a:p>
+            <a:pPr algn="ctr"/>
+            <a:endParaRPr lang="ko-KR" altLang="en-US"/>
+          </a:p>
+        </p:txBody>
+      </p:sp>
+      <p:sp>
+        <p:nvSpPr>
+          <p:cNvPr id="10" name="직사각형 9">
+            <a:extLst>
+              <a:ext uri="{FF2B5EF4-FFF2-40B4-BE49-F238E27FC236}">
+                <a16:creationId xmlns:a16="http://schemas.microsoft.com/office/drawing/2014/main" id="{C42ECC73-2202-08CE-55FF-4C80891B3E7E}"/>
+              </a:ext>
+            </a:extLst>
+          </p:cNvPr>
+          <p:cNvSpPr/>
+          <p:nvPr/>
+        </p:nvSpPr>
+        <p:spPr>
+          <a:xfrm>
+            <a:off x="9753952" y="3635297"/>
+            <a:ext cx="485423" cy="289171"/>
+          </a:xfrm>
+          <a:prstGeom prst="rect">
+            <a:avLst/>
+          </a:prstGeom>
+          <a:solidFill>
+            <a:srgbClr val="FFFF00">
+              <a:alpha val="50000"/>
+            </a:srgbClr>
+          </a:solidFill>
+          <a:ln>
+            <a:solidFill>
+              <a:srgbClr val="FF0000"/>
+            </a:solidFill>
+          </a:ln>
+        </p:spPr>
+        <p:style>
+          <a:lnRef idx="2">
+            <a:schemeClr val="accent1">
+              <a:shade val="15000"/>
+            </a:schemeClr>
+          </a:lnRef>
+          <a:fillRef idx="1">
+            <a:schemeClr val="accent1"/>
+          </a:fillRef>
+          <a:effectRef idx="0">
+            <a:schemeClr val="accent1"/>
+          </a:effectRef>
+          <a:fontRef idx="minor">
+            <a:schemeClr val="lt1"/>
+          </a:fontRef>
+        </p:style>
+        <p:txBody>
+          <a:bodyPr rtlCol="0" anchor="ctr"/>
+          <a:lstStyle/>
+          <a:p>
+            <a:pPr algn="ctr"/>
+            <a:endParaRPr lang="ko-KR" altLang="en-US"/>
+          </a:p>
+        </p:txBody>
+      </p:sp>
+      <p:sp>
+        <p:nvSpPr>
+          <p:cNvPr id="6" name="TextBox 5">
+            <a:extLst>
+              <a:ext uri="{FF2B5EF4-FFF2-40B4-BE49-F238E27FC236}">
+                <a16:creationId xmlns:a16="http://schemas.microsoft.com/office/drawing/2014/main" id="{C759687A-EDB9-BF84-4049-E0C33DA45C85}"/>
+              </a:ext>
+            </a:extLst>
+          </p:cNvPr>
+          <p:cNvSpPr txBox="1"/>
+          <p:nvPr/>
+        </p:nvSpPr>
+        <p:spPr>
+          <a:xfrm>
+            <a:off x="392581" y="630922"/>
+            <a:ext cx="5381601" cy="524246"/>
+          </a:xfrm>
+          <a:prstGeom prst="rect">
+            <a:avLst/>
+          </a:prstGeom>
+          <a:noFill/>
+        </p:spPr>
+        <p:txBody>
+          <a:bodyPr wrap="none" rtlCol="0">
+            <a:spAutoFit/>
+          </a:bodyPr>
+          <a:lstStyle/>
+          <a:p>
+            <a:pPr>
+              <a:lnSpc>
+                <a:spcPct val="150000"/>
+              </a:lnSpc>
+            </a:pPr>
+            <a:r>
+              <a:rPr lang="ko-KR" altLang="en-US" sz="1000" dirty="0"/>
+              <a:t>개선 전</a:t>
+            </a:r>
+            <a:endParaRPr lang="en-US" altLang="ko-KR" sz="1000" dirty="0"/>
+          </a:p>
+          <a:p>
+            <a:pPr>
+              <a:lnSpc>
+                <a:spcPct val="150000"/>
+              </a:lnSpc>
+            </a:pPr>
+            <a:r>
+              <a:rPr lang="en-US" altLang="ko-KR" sz="1000" dirty="0"/>
+              <a:t> - ID804_VDD</a:t>
+            </a:r>
+            <a:r>
+              <a:rPr lang="ko-KR" altLang="en-US" sz="1000" dirty="0"/>
+              <a:t>의 리플 전압 및 상승 시간이 과도하여</a:t>
+            </a:r>
+            <a:r>
+              <a:rPr lang="en-US" altLang="ko-KR" sz="1000" dirty="0"/>
+              <a:t>, ID804 </a:t>
+            </a:r>
+            <a:r>
+              <a:rPr lang="ko-KR" altLang="en-US" sz="1000" dirty="0"/>
+              <a:t>동작 안정성 저하 가능성</a:t>
+            </a:r>
+            <a:r>
+              <a:rPr lang="en-US" altLang="ko-KR" sz="1000" dirty="0"/>
+              <a:t> </a:t>
+            </a:r>
+            <a:r>
+              <a:rPr lang="ko-KR" altLang="en-US" sz="1000" dirty="0"/>
+              <a:t>있음</a:t>
+            </a:r>
+            <a:r>
+              <a:rPr lang="en-US" altLang="ko-KR" sz="1000" dirty="0"/>
+              <a:t>.</a:t>
+            </a:r>
+            <a:endParaRPr lang="ko-KR" altLang="en-US" sz="1000" dirty="0"/>
+          </a:p>
+        </p:txBody>
+      </p:sp>
     </p:spTree>
     <p:extLst>
       <p:ext uri="{BB962C8B-B14F-4D97-AF65-F5344CB8AC3E}">
@@ -6235,7 +10394,7 @@
 </p:sld>
 </file>
 
-<file path=ppt/slides/slide7.xml><?xml version="1.0" encoding="utf-8"?>
+<file path=ppt/slides/slide8.xml><?xml version="1.0" encoding="utf-8"?>
 <p:sld xmlns:a="http://schemas.openxmlformats.org/drawingml/2006/main" xmlns:r="http://schemas.openxmlformats.org/officeDocument/2006/relationships" xmlns:p="http://schemas.openxmlformats.org/presentationml/2006/main">
   <p:cSld>
     <p:spTree>
@@ -6285,7 +10444,7 @@
                 <a:cs typeface="Calibri Light" panose="020F0302020204030204" pitchFamily="34" charset="0"/>
               </a:rPr>
               <a:pPr/>
-              <a:t>7</a:t>
+              <a:t>8</a:t>
             </a:fld>
             <a:endParaRPr lang="en-US" dirty="0">
               <a:latin typeface="Calibri Light" panose="020F0302020204030204" pitchFamily="34" charset="0"/>
@@ -6324,13 +10483,17 @@
           <a:p>
             <a:r>
               <a:rPr lang="en-US" altLang="ko-KR" b="1" dirty="0">
-                <a:latin typeface="Calibri Light" panose="020F0302020204030204" pitchFamily="34" charset="0"/>
                 <a:cs typeface="Calibri Light" panose="020F0302020204030204" pitchFamily="34" charset="0"/>
               </a:rPr>
-              <a:t>VDD Ripple</a:t>
+              <a:t>ID804_VDD </a:t>
+            </a:r>
+            <a:r>
+              <a:rPr lang="ko-KR" altLang="en-US" b="1" dirty="0">
+                <a:cs typeface="Calibri Light" panose="020F0302020204030204" pitchFamily="34" charset="0"/>
+              </a:rPr>
+              <a:t>전원 안정성 이슈</a:t>
             </a:r>
             <a:endParaRPr lang="en-US" altLang="ko-KR" dirty="0">
-              <a:latin typeface="Arial" panose="020B0604020202020204" pitchFamily="34" charset="0"/>
               <a:cs typeface="Arial" panose="020B0604020202020204" pitchFamily="34" charset="0"/>
             </a:endParaRPr>
           </a:p>
@@ -6671,6 +10834,91 @@
           </a:graphicData>
         </a:graphic>
       </p:graphicFrame>
+      <p:sp>
+        <p:nvSpPr>
+          <p:cNvPr id="8" name="TextBox 7">
+            <a:extLst>
+              <a:ext uri="{FF2B5EF4-FFF2-40B4-BE49-F238E27FC236}">
+                <a16:creationId xmlns:a16="http://schemas.microsoft.com/office/drawing/2014/main" id="{F636B487-A6A4-A899-F6DC-DD3B2AFEB957}"/>
+              </a:ext>
+            </a:extLst>
+          </p:cNvPr>
+          <p:cNvSpPr txBox="1"/>
+          <p:nvPr/>
+        </p:nvSpPr>
+        <p:spPr>
+          <a:xfrm>
+            <a:off x="392581" y="630922"/>
+            <a:ext cx="5759910" cy="524246"/>
+          </a:xfrm>
+          <a:prstGeom prst="rect">
+            <a:avLst/>
+          </a:prstGeom>
+          <a:noFill/>
+        </p:spPr>
+        <p:txBody>
+          <a:bodyPr wrap="none" rtlCol="0">
+            <a:spAutoFit/>
+          </a:bodyPr>
+          <a:lstStyle/>
+          <a:p>
+            <a:pPr>
+              <a:lnSpc>
+                <a:spcPct val="150000"/>
+              </a:lnSpc>
+            </a:pPr>
+            <a:r>
+              <a:rPr lang="ko-KR" altLang="en-US" sz="1000" dirty="0"/>
+              <a:t>개선 전</a:t>
+            </a:r>
+            <a:endParaRPr lang="en-US" altLang="ko-KR" sz="1000" dirty="0"/>
+          </a:p>
+          <a:p>
+            <a:pPr>
+              <a:lnSpc>
+                <a:spcPct val="150000"/>
+              </a:lnSpc>
+            </a:pPr>
+            <a:r>
+              <a:rPr lang="en-US" altLang="ko-KR" sz="1000" dirty="0"/>
+              <a:t> - ID804_VDD</a:t>
+            </a:r>
+            <a:r>
+              <a:rPr lang="ko-KR" altLang="en-US" sz="1000" dirty="0"/>
+              <a:t> 주변 </a:t>
+            </a:r>
+            <a:r>
+              <a:rPr lang="ko-KR" altLang="en-US" sz="1000" dirty="0" err="1"/>
+              <a:t>커패시터</a:t>
+            </a:r>
+            <a:r>
+              <a:rPr lang="ko-KR" altLang="en-US" sz="1000" dirty="0"/>
+              <a:t> 용량 및 구성을 변경하여</a:t>
+            </a:r>
+            <a:r>
+              <a:rPr lang="en-US" altLang="ko-KR" sz="1000" dirty="0"/>
+              <a:t>, </a:t>
+            </a:r>
+            <a:r>
+              <a:rPr lang="ko-KR" altLang="en-US" sz="1000" dirty="0"/>
+              <a:t>전원 리플을 저감하고 </a:t>
+            </a:r>
+            <a:r>
+              <a:rPr lang="en-US" altLang="ko-KR" sz="1000" dirty="0"/>
+              <a:t>rise time</a:t>
+            </a:r>
+            <a:r>
+              <a:rPr lang="ko-KR" altLang="en-US" sz="1000" dirty="0"/>
+              <a:t>을 개선함</a:t>
+            </a:r>
+            <a:r>
+              <a:rPr lang="en-US" altLang="ko-KR" sz="1000" dirty="0"/>
+              <a:t>.</a:t>
+            </a:r>
+            <a:endParaRPr lang="ko-KR" altLang="en-US" sz="1000" dirty="0"/>
+          </a:p>
+        </p:txBody>
+      </p:sp>
     </p:spTree>
     <p:extLst>
       <p:ext uri="{BB962C8B-B14F-4D97-AF65-F5344CB8AC3E}">
@@ -6684,7 +10932,7 @@
 </p:sld>
 </file>
 
-<file path=ppt/slides/slide8.xml><?xml version="1.0" encoding="utf-8"?>
+<file path=ppt/slides/slide9.xml><?xml version="1.0" encoding="utf-8"?>
 <p:sld xmlns:a="http://schemas.openxmlformats.org/drawingml/2006/main" xmlns:r="http://schemas.openxmlformats.org/officeDocument/2006/relationships" xmlns:p="http://schemas.openxmlformats.org/presentationml/2006/main">
   <p:cSld>
     <p:spTree>
@@ -6742,11 +10990,30 @@
             </a:pPr>
             <a:r>
               <a:rPr lang="en-US" sz="3200" b="1" dirty="0">
-                <a:latin typeface="Calibri Light" panose="020F0302020204030204" pitchFamily="34" charset="0"/>
                 <a:cs typeface="Calibri Light" panose="020F0302020204030204" pitchFamily="34" charset="0"/>
               </a:rPr>
-              <a:t>ID804_RXD</a:t>
-            </a:r>
+              <a:t>ID804_RXD / ID804-RXD</a:t>
+            </a:r>
+            <a:br>
+              <a:rPr lang="en-US" sz="3200" b="1" dirty="0">
+                <a:cs typeface="Calibri Light" panose="020F0302020204030204" pitchFamily="34" charset="0"/>
+              </a:rPr>
+            </a:br>
+            <a:r>
+              <a:rPr lang="en-US" sz="3200" b="1" dirty="0">
+                <a:cs typeface="Calibri Light" panose="020F0302020204030204" pitchFamily="34" charset="0"/>
+              </a:rPr>
+              <a:t>Net Label </a:t>
+            </a:r>
+            <a:r>
+              <a:rPr lang="ko-KR" altLang="en-US" sz="3200" b="1" dirty="0">
+                <a:cs typeface="Calibri Light" panose="020F0302020204030204" pitchFamily="34" charset="0"/>
+              </a:rPr>
+              <a:t>불일치</a:t>
+            </a:r>
+            <a:endParaRPr lang="en-US" sz="3200" b="1" dirty="0">
+              <a:cs typeface="Calibri Light" panose="020F0302020204030204" pitchFamily="34" charset="0"/>
+            </a:endParaRPr>
           </a:p>
         </p:txBody>
       </p:sp>
@@ -6754,294 +11021,6 @@
     <p:extLst>
       <p:ext uri="{BB962C8B-B14F-4D97-AF65-F5344CB8AC3E}">
         <p14:creationId xmlns:p14="http://schemas.microsoft.com/office/powerpoint/2010/main" val="3203369173"/>
-      </p:ext>
-    </p:extLst>
-  </p:cSld>
-  <p:clrMapOvr>
-    <a:masterClrMapping/>
-  </p:clrMapOvr>
-</p:sld>
-</file>
-
-<file path=ppt/slides/slide9.xml><?xml version="1.0" encoding="utf-8"?>
-<p:sld xmlns:a="http://schemas.openxmlformats.org/drawingml/2006/main" xmlns:r="http://schemas.openxmlformats.org/officeDocument/2006/relationships" xmlns:p="http://schemas.openxmlformats.org/presentationml/2006/main">
-  <p:cSld>
-    <p:spTree>
-      <p:nvGrpSpPr>
-        <p:cNvPr id="1" name="">
-          <a:extLst>
-            <a:ext uri="{FF2B5EF4-FFF2-40B4-BE49-F238E27FC236}">
-              <a16:creationId xmlns:a16="http://schemas.microsoft.com/office/drawing/2014/main" id="{2DAF9809-4A14-789F-908F-5BC6C7FD7E1C}"/>
-            </a:ext>
-          </a:extLst>
-        </p:cNvPr>
-        <p:cNvGrpSpPr/>
-        <p:nvPr/>
-      </p:nvGrpSpPr>
-      <p:grpSpPr>
-        <a:xfrm>
-          <a:off x="0" y="0"/>
-          <a:ext cx="0" cy="0"/>
-          <a:chOff x="0" y="0"/>
-          <a:chExt cx="0" cy="0"/>
-        </a:xfrm>
-      </p:grpSpPr>
-      <p:sp>
-        <p:nvSpPr>
-          <p:cNvPr id="9" name="슬라이드 번호 개체 틀 8">
-            <a:extLst>
-              <a:ext uri="{FF2B5EF4-FFF2-40B4-BE49-F238E27FC236}">
-                <a16:creationId xmlns:a16="http://schemas.microsoft.com/office/drawing/2014/main" id="{8D960AF7-204F-9BA5-4E07-BC4769C95C8A}"/>
-              </a:ext>
-            </a:extLst>
-          </p:cNvPr>
-          <p:cNvSpPr>
-            <a:spLocks noGrp="1"/>
-          </p:cNvSpPr>
-          <p:nvPr>
-            <p:ph type="sldNum" sz="quarter" idx="4"/>
-          </p:nvPr>
-        </p:nvSpPr>
-        <p:spPr/>
-        <p:txBody>
-          <a:bodyPr/>
-          <a:lstStyle/>
-          <a:p>
-            <a:fld id="{83D7C3DD-38B7-4D6D-B394-0849C77A12EC}" type="slidenum">
-              <a:rPr lang="en-US" smtClean="0">
-                <a:latin typeface="Calibri Light" panose="020F0302020204030204" pitchFamily="34" charset="0"/>
-                <a:cs typeface="Calibri Light" panose="020F0302020204030204" pitchFamily="34" charset="0"/>
-              </a:rPr>
-              <a:pPr/>
-              <a:t>9</a:t>
-            </a:fld>
-            <a:endParaRPr lang="en-US" dirty="0">
-              <a:latin typeface="Calibri Light" panose="020F0302020204030204" pitchFamily="34" charset="0"/>
-              <a:cs typeface="Calibri Light" panose="020F0302020204030204" pitchFamily="34" charset="0"/>
-            </a:endParaRPr>
-          </a:p>
-        </p:txBody>
-      </p:sp>
-      <p:sp>
-        <p:nvSpPr>
-          <p:cNvPr id="3" name="TextBox 2">
-            <a:extLst>
-              <a:ext uri="{FF2B5EF4-FFF2-40B4-BE49-F238E27FC236}">
-                <a16:creationId xmlns:a16="http://schemas.microsoft.com/office/drawing/2014/main" id="{FAD06A71-99E5-467F-0CE4-5EDA5BCEDDA3}"/>
-              </a:ext>
-            </a:extLst>
-          </p:cNvPr>
-          <p:cNvSpPr txBox="1"/>
-          <p:nvPr/>
-        </p:nvSpPr>
-        <p:spPr>
-          <a:xfrm>
-            <a:off x="182088" y="0"/>
-            <a:ext cx="12009912" cy="498764"/>
-          </a:xfrm>
-          <a:prstGeom prst="rect">
-            <a:avLst/>
-          </a:prstGeom>
-          <a:noFill/>
-        </p:spPr>
-        <p:txBody>
-          <a:bodyPr wrap="square" lIns="36000" tIns="36000" rIns="36000" bIns="36000" rtlCol="0" anchor="ctr" anchorCtr="0">
-            <a:noAutofit/>
-          </a:bodyPr>
-          <a:lstStyle/>
-          <a:p>
-            <a:r>
-              <a:rPr lang="en-US" altLang="ko-KR" b="1" dirty="0">
-                <a:latin typeface="Calibri Light" panose="020F0302020204030204" pitchFamily="34" charset="0"/>
-                <a:cs typeface="Calibri Light" panose="020F0302020204030204" pitchFamily="34" charset="0"/>
-              </a:rPr>
-              <a:t>ID804_RXD</a:t>
-            </a:r>
-            <a:endParaRPr lang="en-US" altLang="ko-KR" dirty="0">
-              <a:latin typeface="Arial" panose="020B0604020202020204" pitchFamily="34" charset="0"/>
-              <a:cs typeface="Arial" panose="020B0604020202020204" pitchFamily="34" charset="0"/>
-            </a:endParaRPr>
-          </a:p>
-        </p:txBody>
-      </p:sp>
-      <p:pic>
-        <p:nvPicPr>
-          <p:cNvPr id="7" name="그림 6">
-            <a:extLst>
-              <a:ext uri="{FF2B5EF4-FFF2-40B4-BE49-F238E27FC236}">
-                <a16:creationId xmlns:a16="http://schemas.microsoft.com/office/drawing/2014/main" id="{83B030F8-12C8-7946-1D9B-83734ABEE277}"/>
-              </a:ext>
-            </a:extLst>
-          </p:cNvPr>
-          <p:cNvPicPr>
-            <a:picLocks noChangeAspect="1"/>
-          </p:cNvPicPr>
-          <p:nvPr/>
-        </p:nvPicPr>
-        <p:blipFill>
-          <a:blip r:embed="rId2"/>
-          <a:stretch>
-            <a:fillRect/>
-          </a:stretch>
-        </p:blipFill>
-        <p:spPr>
-          <a:xfrm>
-            <a:off x="740644" y="1543730"/>
-            <a:ext cx="6039160" cy="3759393"/>
-          </a:xfrm>
-          <a:prstGeom prst="rect">
-            <a:avLst/>
-          </a:prstGeom>
-          <a:ln>
-            <a:solidFill>
-              <a:schemeClr val="accent1"/>
-            </a:solidFill>
-          </a:ln>
-        </p:spPr>
-      </p:pic>
-      <p:pic>
-        <p:nvPicPr>
-          <p:cNvPr id="10" name="그림 9">
-            <a:extLst>
-              <a:ext uri="{FF2B5EF4-FFF2-40B4-BE49-F238E27FC236}">
-                <a16:creationId xmlns:a16="http://schemas.microsoft.com/office/drawing/2014/main" id="{056E1648-FE1B-39C8-24E9-028E45A77496}"/>
-              </a:ext>
-            </a:extLst>
-          </p:cNvPr>
-          <p:cNvPicPr>
-            <a:picLocks noChangeAspect="1"/>
-          </p:cNvPicPr>
-          <p:nvPr/>
-        </p:nvPicPr>
-        <p:blipFill>
-          <a:blip r:embed="rId3"/>
-          <a:stretch>
-            <a:fillRect/>
-          </a:stretch>
-        </p:blipFill>
-        <p:spPr>
-          <a:xfrm>
-            <a:off x="7883438" y="2181937"/>
-            <a:ext cx="3378374" cy="2482978"/>
-          </a:xfrm>
-          <a:prstGeom prst="rect">
-            <a:avLst/>
-          </a:prstGeom>
-          <a:ln>
-            <a:solidFill>
-              <a:schemeClr val="accent1"/>
-            </a:solidFill>
-          </a:ln>
-        </p:spPr>
-      </p:pic>
-      <p:sp>
-        <p:nvSpPr>
-          <p:cNvPr id="13" name="직사각형 12">
-            <a:extLst>
-              <a:ext uri="{FF2B5EF4-FFF2-40B4-BE49-F238E27FC236}">
-                <a16:creationId xmlns:a16="http://schemas.microsoft.com/office/drawing/2014/main" id="{7656ACD5-8B8A-7B30-4248-CFF3A610ABC6}"/>
-              </a:ext>
-            </a:extLst>
-          </p:cNvPr>
-          <p:cNvSpPr/>
-          <p:nvPr/>
-        </p:nvSpPr>
-        <p:spPr>
-          <a:xfrm>
-            <a:off x="845820" y="3726180"/>
-            <a:ext cx="502920" cy="152400"/>
-          </a:xfrm>
-          <a:prstGeom prst="rect">
-            <a:avLst/>
-          </a:prstGeom>
-          <a:noFill/>
-          <a:ln>
-            <a:solidFill>
-              <a:srgbClr val="FF0000"/>
-            </a:solidFill>
-          </a:ln>
-        </p:spPr>
-        <p:style>
-          <a:lnRef idx="2">
-            <a:schemeClr val="accent1">
-              <a:shade val="15000"/>
-            </a:schemeClr>
-          </a:lnRef>
-          <a:fillRef idx="1">
-            <a:schemeClr val="accent1"/>
-          </a:fillRef>
-          <a:effectRef idx="0">
-            <a:schemeClr val="accent1"/>
-          </a:effectRef>
-          <a:fontRef idx="minor">
-            <a:schemeClr val="lt1"/>
-          </a:fontRef>
-        </p:style>
-        <p:txBody>
-          <a:bodyPr rtlCol="0" anchor="ctr"/>
-          <a:lstStyle/>
-          <a:p>
-            <a:pPr algn="ctr"/>
-            <a:endParaRPr lang="ko-KR" altLang="en-US"/>
-          </a:p>
-        </p:txBody>
-      </p:sp>
-      <p:sp>
-        <p:nvSpPr>
-          <p:cNvPr id="15" name="직사각형 14">
-            <a:extLst>
-              <a:ext uri="{FF2B5EF4-FFF2-40B4-BE49-F238E27FC236}">
-                <a16:creationId xmlns:a16="http://schemas.microsoft.com/office/drawing/2014/main" id="{64ECD5F1-5E3A-E0FD-5898-1E9F1CBA144C}"/>
-              </a:ext>
-            </a:extLst>
-          </p:cNvPr>
-          <p:cNvSpPr/>
-          <p:nvPr/>
-        </p:nvSpPr>
-        <p:spPr>
-          <a:xfrm>
-            <a:off x="10766512" y="3108960"/>
-            <a:ext cx="502920" cy="152400"/>
-          </a:xfrm>
-          <a:prstGeom prst="rect">
-            <a:avLst/>
-          </a:prstGeom>
-          <a:noFill/>
-          <a:ln>
-            <a:solidFill>
-              <a:srgbClr val="FF0000"/>
-            </a:solidFill>
-          </a:ln>
-        </p:spPr>
-        <p:style>
-          <a:lnRef idx="2">
-            <a:schemeClr val="accent1">
-              <a:shade val="15000"/>
-            </a:schemeClr>
-          </a:lnRef>
-          <a:fillRef idx="1">
-            <a:schemeClr val="accent1"/>
-          </a:fillRef>
-          <a:effectRef idx="0">
-            <a:schemeClr val="accent1"/>
-          </a:effectRef>
-          <a:fontRef idx="minor">
-            <a:schemeClr val="lt1"/>
-          </a:fontRef>
-        </p:style>
-        <p:txBody>
-          <a:bodyPr rtlCol="0" anchor="ctr"/>
-          <a:lstStyle/>
-          <a:p>
-            <a:pPr algn="ctr"/>
-            <a:endParaRPr lang="ko-KR" altLang="en-US"/>
-          </a:p>
-        </p:txBody>
-      </p:sp>
-    </p:spTree>
-    <p:extLst>
-      <p:ext uri="{BB962C8B-B14F-4D97-AF65-F5344CB8AC3E}">
-        <p14:creationId xmlns:p14="http://schemas.microsoft.com/office/powerpoint/2010/main" val="266344806"/>
       </p:ext>
     </p:extLst>
   </p:cSld>
